--- a/docs/SC_Wave_Game_Model.pptx
+++ b/docs/SC_Wave_Game_Model.pptx
@@ -5,29 +5,29 @@
     <p:sldMasterId id="2147483648" r:id="rId1"/>
   </p:sldMasterIdLst>
   <p:sldIdLst>
-    <p:sldId id="256" r:id="rId7"/>
-    <p:sldId id="257" r:id="rId8"/>
-    <p:sldId id="258" r:id="rId9"/>
-    <p:sldId id="259" r:id="rId10"/>
-    <p:sldId id="260" r:id="rId11"/>
-    <p:sldId id="261" r:id="rId12"/>
-    <p:sldId id="262" r:id="rId13"/>
-    <p:sldId id="263" r:id="rId14"/>
-    <p:sldId id="264" r:id="rId15"/>
-    <p:sldId id="265" r:id="rId16"/>
-    <p:sldId id="266" r:id="rId17"/>
-    <p:sldId id="267" r:id="rId18"/>
-    <p:sldId id="268" r:id="rId19"/>
-    <p:sldId id="269" r:id="rId20"/>
-    <p:sldId id="270" r:id="rId21"/>
-    <p:sldId id="271" r:id="rId22"/>
-    <p:sldId id="272" r:id="rId23"/>
-    <p:sldId id="273" r:id="rId24"/>
-    <p:sldId id="274" r:id="rId25"/>
-    <p:sldId id="275" r:id="rId26"/>
-    <p:sldId id="276" r:id="rId27"/>
+    <p:sldId id="256" r:id="rId2"/>
+    <p:sldId id="257" r:id="rId3"/>
+    <p:sldId id="258" r:id="rId4"/>
+    <p:sldId id="259" r:id="rId5"/>
+    <p:sldId id="260" r:id="rId6"/>
+    <p:sldId id="261" r:id="rId7"/>
+    <p:sldId id="262" r:id="rId8"/>
+    <p:sldId id="263" r:id="rId9"/>
+    <p:sldId id="264" r:id="rId10"/>
+    <p:sldId id="265" r:id="rId11"/>
+    <p:sldId id="266" r:id="rId12"/>
+    <p:sldId id="267" r:id="rId13"/>
+    <p:sldId id="268" r:id="rId14"/>
+    <p:sldId id="269" r:id="rId15"/>
+    <p:sldId id="270" r:id="rId16"/>
+    <p:sldId id="271" r:id="rId17"/>
+    <p:sldId id="272" r:id="rId18"/>
+    <p:sldId id="273" r:id="rId19"/>
+    <p:sldId id="274" r:id="rId20"/>
+    <p:sldId id="275" r:id="rId21"/>
+    <p:sldId id="276" r:id="rId22"/>
   </p:sldIdLst>
-  <p:sldSz cx="12188952" cy="6858000" type="screen4x3"/>
+  <p:sldSz cx="12188825" cy="6858000"/>
   <p:notesSz cx="6858000" cy="9144000"/>
   <p:defaultTextStyle>
     <a:defPPr>
@@ -124,6 +124,22 @@
       </a:defRPr>
     </a:lvl9pPr>
   </p:defaultTextStyle>
+  <p:extLst>
+    <p:ext uri="{EFAFB233-063F-42B5-8137-9DF3F51BA10A}">
+      <p15:sldGuideLst xmlns:p15="http://schemas.microsoft.com/office/powerpoint/2012/main">
+        <p15:guide id="1" orient="horz" pos="2160">
+          <p15:clr>
+            <a:srgbClr val="A4A3A4"/>
+          </p15:clr>
+        </p15:guide>
+        <p15:guide id="2" pos="2880">
+          <p15:clr>
+            <a:srgbClr val="A4A3A4"/>
+          </p15:clr>
+        </p15:guide>
+      </p15:sldGuideLst>
+    </p:ext>
+  </p:extLst>
 </p:presentation>
 </file>
 
@@ -165,10 +181,9 @@
           <a:lstStyle/>
           <a:p>
             <a:r>
-              <a:rPr lang="en-US" smtClean="0"/>
+              <a:rPr lang="en-US"/>
               <a:t>Click to edit Master title style</a:t>
             </a:r>
-            <a:endParaRPr lang="en-US"/>
           </a:p>
         </p:txBody>
       </p:sp>
@@ -284,10 +299,9 @@
           </a:lstStyle>
           <a:p>
             <a:r>
-              <a:rPr lang="en-US" smtClean="0"/>
+              <a:rPr lang="en-US"/>
               <a:t>Click to edit Master subtitle style</a:t>
             </a:r>
-            <a:endParaRPr lang="en-US"/>
           </a:p>
         </p:txBody>
       </p:sp>
@@ -308,7 +322,7 @@
           <a:p>
             <a:fld id="{5BCAD085-E8A6-8845-BD4E-CB4CCA059FC4}" type="datetimeFigureOut">
               <a:rPr lang="en-US" smtClean="0"/>
-              <a:t>1/27/13</a:t>
+              <a:t>6/4/26</a:t>
             </a:fld>
             <a:endParaRPr lang="en-US"/>
           </a:p>
@@ -402,10 +416,9 @@
           <a:lstStyle/>
           <a:p>
             <a:r>
-              <a:rPr lang="en-US" smtClean="0"/>
+              <a:rPr lang="en-US"/>
               <a:t>Click to edit Master title style</a:t>
             </a:r>
-            <a:endParaRPr lang="en-US"/>
           </a:p>
         </p:txBody>
       </p:sp>
@@ -426,38 +439,37 @@
           <a:p>
             <a:pPr lvl="0"/>
             <a:r>
-              <a:rPr lang="en-US" smtClean="0"/>
+              <a:rPr lang="en-US"/>
               <a:t>Click to edit Master text styles</a:t>
             </a:r>
           </a:p>
           <a:p>
             <a:pPr lvl="1"/>
             <a:r>
-              <a:rPr lang="en-US" smtClean="0"/>
+              <a:rPr lang="en-US"/>
               <a:t>Second level</a:t>
             </a:r>
           </a:p>
           <a:p>
             <a:pPr lvl="2"/>
             <a:r>
-              <a:rPr lang="en-US" smtClean="0"/>
+              <a:rPr lang="en-US"/>
               <a:t>Third level</a:t>
             </a:r>
           </a:p>
           <a:p>
             <a:pPr lvl="3"/>
             <a:r>
-              <a:rPr lang="en-US" smtClean="0"/>
+              <a:rPr lang="en-US"/>
               <a:t>Fourth level</a:t>
             </a:r>
           </a:p>
           <a:p>
             <a:pPr lvl="4"/>
             <a:r>
-              <a:rPr lang="en-US" smtClean="0"/>
+              <a:rPr lang="en-US"/>
               <a:t>Fifth level</a:t>
             </a:r>
-            <a:endParaRPr lang="en-US"/>
           </a:p>
         </p:txBody>
       </p:sp>
@@ -478,7 +490,7 @@
           <a:p>
             <a:fld id="{5BCAD085-E8A6-8845-BD4E-CB4CCA059FC4}" type="datetimeFigureOut">
               <a:rPr lang="en-US" smtClean="0"/>
-              <a:t>1/27/13</a:t>
+              <a:t>6/4/26</a:t>
             </a:fld>
             <a:endParaRPr lang="en-US"/>
           </a:p>
@@ -577,10 +589,9 @@
           <a:lstStyle/>
           <a:p>
             <a:r>
-              <a:rPr lang="en-US" smtClean="0"/>
+              <a:rPr lang="en-US"/>
               <a:t>Click to edit Master title style</a:t>
             </a:r>
-            <a:endParaRPr lang="en-US"/>
           </a:p>
         </p:txBody>
       </p:sp>
@@ -606,38 +617,37 @@
           <a:p>
             <a:pPr lvl="0"/>
             <a:r>
-              <a:rPr lang="en-US" smtClean="0"/>
+              <a:rPr lang="en-US"/>
               <a:t>Click to edit Master text styles</a:t>
             </a:r>
           </a:p>
           <a:p>
             <a:pPr lvl="1"/>
             <a:r>
-              <a:rPr lang="en-US" smtClean="0"/>
+              <a:rPr lang="en-US"/>
               <a:t>Second level</a:t>
             </a:r>
           </a:p>
           <a:p>
             <a:pPr lvl="2"/>
             <a:r>
-              <a:rPr lang="en-US" smtClean="0"/>
+              <a:rPr lang="en-US"/>
               <a:t>Third level</a:t>
             </a:r>
           </a:p>
           <a:p>
             <a:pPr lvl="3"/>
             <a:r>
-              <a:rPr lang="en-US" smtClean="0"/>
+              <a:rPr lang="en-US"/>
               <a:t>Fourth level</a:t>
             </a:r>
           </a:p>
           <a:p>
             <a:pPr lvl="4"/>
             <a:r>
-              <a:rPr lang="en-US" smtClean="0"/>
+              <a:rPr lang="en-US"/>
               <a:t>Fifth level</a:t>
             </a:r>
-            <a:endParaRPr lang="en-US"/>
           </a:p>
         </p:txBody>
       </p:sp>
@@ -658,7 +668,7 @@
           <a:p>
             <a:fld id="{5BCAD085-E8A6-8845-BD4E-CB4CCA059FC4}" type="datetimeFigureOut">
               <a:rPr lang="en-US" smtClean="0"/>
-              <a:t>1/27/13</a:t>
+              <a:t>6/4/26</a:t>
             </a:fld>
             <a:endParaRPr lang="en-US"/>
           </a:p>
@@ -752,10 +762,9 @@
           <a:lstStyle/>
           <a:p>
             <a:r>
-              <a:rPr lang="en-US" smtClean="0"/>
+              <a:rPr lang="en-US"/>
               <a:t>Click to edit Master title style</a:t>
             </a:r>
-            <a:endParaRPr lang="en-US"/>
           </a:p>
         </p:txBody>
       </p:sp>
@@ -776,38 +785,37 @@
           <a:p>
             <a:pPr lvl="0"/>
             <a:r>
-              <a:rPr lang="en-US" smtClean="0"/>
+              <a:rPr lang="en-US"/>
               <a:t>Click to edit Master text styles</a:t>
             </a:r>
           </a:p>
           <a:p>
             <a:pPr lvl="1"/>
             <a:r>
-              <a:rPr lang="en-US" smtClean="0"/>
+              <a:rPr lang="en-US"/>
               <a:t>Second level</a:t>
             </a:r>
           </a:p>
           <a:p>
             <a:pPr lvl="2"/>
             <a:r>
-              <a:rPr lang="en-US" smtClean="0"/>
+              <a:rPr lang="en-US"/>
               <a:t>Third level</a:t>
             </a:r>
           </a:p>
           <a:p>
             <a:pPr lvl="3"/>
             <a:r>
-              <a:rPr lang="en-US" smtClean="0"/>
+              <a:rPr lang="en-US"/>
               <a:t>Fourth level</a:t>
             </a:r>
           </a:p>
           <a:p>
             <a:pPr lvl="4"/>
             <a:r>
-              <a:rPr lang="en-US" smtClean="0"/>
+              <a:rPr lang="en-US"/>
               <a:t>Fifth level</a:t>
             </a:r>
-            <a:endParaRPr lang="en-US"/>
           </a:p>
         </p:txBody>
       </p:sp>
@@ -828,7 +836,7 @@
           <a:p>
             <a:fld id="{5BCAD085-E8A6-8845-BD4E-CB4CCA059FC4}" type="datetimeFigureOut">
               <a:rPr lang="en-US" smtClean="0"/>
-              <a:t>1/27/13</a:t>
+              <a:t>6/4/26</a:t>
             </a:fld>
             <a:endParaRPr lang="en-US"/>
           </a:p>
@@ -931,10 +939,9 @@
           </a:lstStyle>
           <a:p>
             <a:r>
-              <a:rPr lang="en-US" smtClean="0"/>
+              <a:rPr lang="en-US"/>
               <a:t>Click to edit Master title style</a:t>
             </a:r>
-            <a:endParaRPr lang="en-US"/>
           </a:p>
         </p:txBody>
       </p:sp>
@@ -1051,7 +1058,7 @@
           <a:p>
             <a:pPr lvl="0"/>
             <a:r>
-              <a:rPr lang="en-US" smtClean="0"/>
+              <a:rPr lang="en-US"/>
               <a:t>Click to edit Master text styles</a:t>
             </a:r>
           </a:p>
@@ -1074,7 +1081,7 @@
           <a:p>
             <a:fld id="{5BCAD085-E8A6-8845-BD4E-CB4CCA059FC4}" type="datetimeFigureOut">
               <a:rPr lang="en-US" smtClean="0"/>
-              <a:t>1/27/13</a:t>
+              <a:t>6/4/26</a:t>
             </a:fld>
             <a:endParaRPr lang="en-US"/>
           </a:p>
@@ -1168,10 +1175,9 @@
           <a:lstStyle/>
           <a:p>
             <a:r>
-              <a:rPr lang="en-US" smtClean="0"/>
+              <a:rPr lang="en-US"/>
               <a:t>Click to edit Master title style</a:t>
             </a:r>
-            <a:endParaRPr lang="en-US"/>
           </a:p>
         </p:txBody>
       </p:sp>
@@ -1225,38 +1231,37 @@
           <a:p>
             <a:pPr lvl="0"/>
             <a:r>
-              <a:rPr lang="en-US" smtClean="0"/>
+              <a:rPr lang="en-US"/>
               <a:t>Click to edit Master text styles</a:t>
             </a:r>
           </a:p>
           <a:p>
             <a:pPr lvl="1"/>
             <a:r>
-              <a:rPr lang="en-US" smtClean="0"/>
+              <a:rPr lang="en-US"/>
               <a:t>Second level</a:t>
             </a:r>
           </a:p>
           <a:p>
             <a:pPr lvl="2"/>
             <a:r>
-              <a:rPr lang="en-US" smtClean="0"/>
+              <a:rPr lang="en-US"/>
               <a:t>Third level</a:t>
             </a:r>
           </a:p>
           <a:p>
             <a:pPr lvl="3"/>
             <a:r>
-              <a:rPr lang="en-US" smtClean="0"/>
+              <a:rPr lang="en-US"/>
               <a:t>Fourth level</a:t>
             </a:r>
           </a:p>
           <a:p>
             <a:pPr lvl="4"/>
             <a:r>
-              <a:rPr lang="en-US" smtClean="0"/>
+              <a:rPr lang="en-US"/>
               <a:t>Fifth level</a:t>
             </a:r>
-            <a:endParaRPr lang="en-US"/>
           </a:p>
         </p:txBody>
       </p:sp>
@@ -1310,38 +1315,37 @@
           <a:p>
             <a:pPr lvl="0"/>
             <a:r>
-              <a:rPr lang="en-US" smtClean="0"/>
+              <a:rPr lang="en-US"/>
               <a:t>Click to edit Master text styles</a:t>
             </a:r>
           </a:p>
           <a:p>
             <a:pPr lvl="1"/>
             <a:r>
-              <a:rPr lang="en-US" smtClean="0"/>
+              <a:rPr lang="en-US"/>
               <a:t>Second level</a:t>
             </a:r>
           </a:p>
           <a:p>
             <a:pPr lvl="2"/>
             <a:r>
-              <a:rPr lang="en-US" smtClean="0"/>
+              <a:rPr lang="en-US"/>
               <a:t>Third level</a:t>
             </a:r>
           </a:p>
           <a:p>
             <a:pPr lvl="3"/>
             <a:r>
-              <a:rPr lang="en-US" smtClean="0"/>
+              <a:rPr lang="en-US"/>
               <a:t>Fourth level</a:t>
             </a:r>
           </a:p>
           <a:p>
             <a:pPr lvl="4"/>
             <a:r>
-              <a:rPr lang="en-US" smtClean="0"/>
+              <a:rPr lang="en-US"/>
               <a:t>Fifth level</a:t>
             </a:r>
-            <a:endParaRPr lang="en-US"/>
           </a:p>
         </p:txBody>
       </p:sp>
@@ -1362,7 +1366,7 @@
           <a:p>
             <a:fld id="{5BCAD085-E8A6-8845-BD4E-CB4CCA059FC4}" type="datetimeFigureOut">
               <a:rPr lang="en-US" smtClean="0"/>
-              <a:t>1/27/13</a:t>
+              <a:t>6/4/26</a:t>
             </a:fld>
             <a:endParaRPr lang="en-US"/>
           </a:p>
@@ -1460,10 +1464,9 @@
           </a:lstStyle>
           <a:p>
             <a:r>
-              <a:rPr lang="en-US" smtClean="0"/>
+              <a:rPr lang="en-US"/>
               <a:t>Click to edit Master title style</a:t>
             </a:r>
-            <a:endParaRPr lang="en-US"/>
           </a:p>
         </p:txBody>
       </p:sp>
@@ -1526,7 +1529,7 @@
           <a:p>
             <a:pPr lvl="0"/>
             <a:r>
-              <a:rPr lang="en-US" smtClean="0"/>
+              <a:rPr lang="en-US"/>
               <a:t>Click to edit Master text styles</a:t>
             </a:r>
           </a:p>
@@ -1582,38 +1585,37 @@
           <a:p>
             <a:pPr lvl="0"/>
             <a:r>
-              <a:rPr lang="en-US" smtClean="0"/>
+              <a:rPr lang="en-US"/>
               <a:t>Click to edit Master text styles</a:t>
             </a:r>
           </a:p>
           <a:p>
             <a:pPr lvl="1"/>
             <a:r>
-              <a:rPr lang="en-US" smtClean="0"/>
+              <a:rPr lang="en-US"/>
               <a:t>Second level</a:t>
             </a:r>
           </a:p>
           <a:p>
             <a:pPr lvl="2"/>
             <a:r>
-              <a:rPr lang="en-US" smtClean="0"/>
+              <a:rPr lang="en-US"/>
               <a:t>Third level</a:t>
             </a:r>
           </a:p>
           <a:p>
             <a:pPr lvl="3"/>
             <a:r>
-              <a:rPr lang="en-US" smtClean="0"/>
+              <a:rPr lang="en-US"/>
               <a:t>Fourth level</a:t>
             </a:r>
           </a:p>
           <a:p>
             <a:pPr lvl="4"/>
             <a:r>
-              <a:rPr lang="en-US" smtClean="0"/>
+              <a:rPr lang="en-US"/>
               <a:t>Fifth level</a:t>
             </a:r>
-            <a:endParaRPr lang="en-US"/>
           </a:p>
         </p:txBody>
       </p:sp>
@@ -1676,7 +1678,7 @@
           <a:p>
             <a:pPr lvl="0"/>
             <a:r>
-              <a:rPr lang="en-US" smtClean="0"/>
+              <a:rPr lang="en-US"/>
               <a:t>Click to edit Master text styles</a:t>
             </a:r>
           </a:p>
@@ -1732,38 +1734,37 @@
           <a:p>
             <a:pPr lvl="0"/>
             <a:r>
-              <a:rPr lang="en-US" smtClean="0"/>
+              <a:rPr lang="en-US"/>
               <a:t>Click to edit Master text styles</a:t>
             </a:r>
           </a:p>
           <a:p>
             <a:pPr lvl="1"/>
             <a:r>
-              <a:rPr lang="en-US" smtClean="0"/>
+              <a:rPr lang="en-US"/>
               <a:t>Second level</a:t>
             </a:r>
           </a:p>
           <a:p>
             <a:pPr lvl="2"/>
             <a:r>
-              <a:rPr lang="en-US" smtClean="0"/>
+              <a:rPr lang="en-US"/>
               <a:t>Third level</a:t>
             </a:r>
           </a:p>
           <a:p>
             <a:pPr lvl="3"/>
             <a:r>
-              <a:rPr lang="en-US" smtClean="0"/>
+              <a:rPr lang="en-US"/>
               <a:t>Fourth level</a:t>
             </a:r>
           </a:p>
           <a:p>
             <a:pPr lvl="4"/>
             <a:r>
-              <a:rPr lang="en-US" smtClean="0"/>
+              <a:rPr lang="en-US"/>
               <a:t>Fifth level</a:t>
             </a:r>
-            <a:endParaRPr lang="en-US"/>
           </a:p>
         </p:txBody>
       </p:sp>
@@ -1784,7 +1785,7 @@
           <a:p>
             <a:fld id="{5BCAD085-E8A6-8845-BD4E-CB4CCA059FC4}" type="datetimeFigureOut">
               <a:rPr lang="en-US" smtClean="0"/>
-              <a:t>1/27/13</a:t>
+              <a:t>6/4/26</a:t>
             </a:fld>
             <a:endParaRPr lang="en-US"/>
           </a:p>
@@ -1878,10 +1879,9 @@
           <a:lstStyle/>
           <a:p>
             <a:r>
-              <a:rPr lang="en-US" smtClean="0"/>
+              <a:rPr lang="en-US"/>
               <a:t>Click to edit Master title style</a:t>
             </a:r>
-            <a:endParaRPr lang="en-US"/>
           </a:p>
         </p:txBody>
       </p:sp>
@@ -1902,7 +1902,7 @@
           <a:p>
             <a:fld id="{5BCAD085-E8A6-8845-BD4E-CB4CCA059FC4}" type="datetimeFigureOut">
               <a:rPr lang="en-US" smtClean="0"/>
-              <a:t>1/27/13</a:t>
+              <a:t>6/4/26</a:t>
             </a:fld>
             <a:endParaRPr lang="en-US"/>
           </a:p>
@@ -1997,7 +1997,7 @@
           <a:p>
             <a:fld id="{5BCAD085-E8A6-8845-BD4E-CB4CCA059FC4}" type="datetimeFigureOut">
               <a:rPr lang="en-US" smtClean="0"/>
-              <a:t>1/27/13</a:t>
+              <a:t>6/4/26</a:t>
             </a:fld>
             <a:endParaRPr lang="en-US"/>
           </a:p>
@@ -2100,10 +2100,9 @@
           </a:lstStyle>
           <a:p>
             <a:r>
-              <a:rPr lang="en-US" smtClean="0"/>
+              <a:rPr lang="en-US"/>
               <a:t>Click to edit Master title style</a:t>
             </a:r>
-            <a:endParaRPr lang="en-US"/>
           </a:p>
         </p:txBody>
       </p:sp>
@@ -2157,38 +2156,37 @@
           <a:p>
             <a:pPr lvl="0"/>
             <a:r>
-              <a:rPr lang="en-US" smtClean="0"/>
+              <a:rPr lang="en-US"/>
               <a:t>Click to edit Master text styles</a:t>
             </a:r>
           </a:p>
           <a:p>
             <a:pPr lvl="1"/>
             <a:r>
-              <a:rPr lang="en-US" smtClean="0"/>
+              <a:rPr lang="en-US"/>
               <a:t>Second level</a:t>
             </a:r>
           </a:p>
           <a:p>
             <a:pPr lvl="2"/>
             <a:r>
-              <a:rPr lang="en-US" smtClean="0"/>
+              <a:rPr lang="en-US"/>
               <a:t>Third level</a:t>
             </a:r>
           </a:p>
           <a:p>
             <a:pPr lvl="3"/>
             <a:r>
-              <a:rPr lang="en-US" smtClean="0"/>
+              <a:rPr lang="en-US"/>
               <a:t>Fourth level</a:t>
             </a:r>
           </a:p>
           <a:p>
             <a:pPr lvl="4"/>
             <a:r>
-              <a:rPr lang="en-US" smtClean="0"/>
+              <a:rPr lang="en-US"/>
               <a:t>Fifth level</a:t>
             </a:r>
-            <a:endParaRPr lang="en-US"/>
           </a:p>
         </p:txBody>
       </p:sp>
@@ -2251,7 +2249,7 @@
           <a:p>
             <a:pPr lvl="0"/>
             <a:r>
-              <a:rPr lang="en-US" smtClean="0"/>
+              <a:rPr lang="en-US"/>
               <a:t>Click to edit Master text styles</a:t>
             </a:r>
           </a:p>
@@ -2274,7 +2272,7 @@
           <a:p>
             <a:fld id="{5BCAD085-E8A6-8845-BD4E-CB4CCA059FC4}" type="datetimeFigureOut">
               <a:rPr lang="en-US" smtClean="0"/>
-              <a:t>1/27/13</a:t>
+              <a:t>6/4/26</a:t>
             </a:fld>
             <a:endParaRPr lang="en-US"/>
           </a:p>
@@ -2377,10 +2375,9 @@
           </a:lstStyle>
           <a:p>
             <a:r>
-              <a:rPr lang="en-US" smtClean="0"/>
+              <a:rPr lang="en-US"/>
               <a:t>Click to edit Master title style</a:t>
             </a:r>
-            <a:endParaRPr lang="en-US"/>
           </a:p>
         </p:txBody>
       </p:sp>
@@ -2504,7 +2501,7 @@
           <a:p>
             <a:pPr lvl="0"/>
             <a:r>
-              <a:rPr lang="en-US" smtClean="0"/>
+              <a:rPr lang="en-US"/>
               <a:t>Click to edit Master text styles</a:t>
             </a:r>
           </a:p>
@@ -2527,7 +2524,7 @@
           <a:p>
             <a:fld id="{5BCAD085-E8A6-8845-BD4E-CB4CCA059FC4}" type="datetimeFigureOut">
               <a:rPr lang="en-US" smtClean="0"/>
-              <a:t>1/27/13</a:t>
+              <a:t>6/4/26</a:t>
             </a:fld>
             <a:endParaRPr lang="en-US"/>
           </a:p>
@@ -2636,10 +2633,9 @@
           <a:lstStyle/>
           <a:p>
             <a:r>
-              <a:rPr lang="en-US" smtClean="0"/>
+              <a:rPr lang="en-US"/>
               <a:t>Click to edit Master title style</a:t>
             </a:r>
-            <a:endParaRPr lang="en-US"/>
           </a:p>
         </p:txBody>
       </p:sp>
@@ -2670,38 +2666,37 @@
           <a:p>
             <a:pPr lvl="0"/>
             <a:r>
-              <a:rPr lang="en-US" smtClean="0"/>
+              <a:rPr lang="en-US"/>
               <a:t>Click to edit Master text styles</a:t>
             </a:r>
           </a:p>
           <a:p>
             <a:pPr lvl="1"/>
             <a:r>
-              <a:rPr lang="en-US" smtClean="0"/>
+              <a:rPr lang="en-US"/>
               <a:t>Second level</a:t>
             </a:r>
           </a:p>
           <a:p>
             <a:pPr lvl="2"/>
             <a:r>
-              <a:rPr lang="en-US" smtClean="0"/>
+              <a:rPr lang="en-US"/>
               <a:t>Third level</a:t>
             </a:r>
           </a:p>
           <a:p>
             <a:pPr lvl="3"/>
             <a:r>
-              <a:rPr lang="en-US" smtClean="0"/>
+              <a:rPr lang="en-US"/>
               <a:t>Fourth level</a:t>
             </a:r>
           </a:p>
           <a:p>
             <a:pPr lvl="4"/>
             <a:r>
-              <a:rPr lang="en-US" smtClean="0"/>
+              <a:rPr lang="en-US"/>
               <a:t>Fifth level</a:t>
             </a:r>
-            <a:endParaRPr lang="en-US"/>
           </a:p>
         </p:txBody>
       </p:sp>
@@ -2740,7 +2735,7 @@
           <a:p>
             <a:fld id="{5BCAD085-E8A6-8845-BD4E-CB4CCA059FC4}" type="datetimeFigureOut">
               <a:rPr lang="en-US" smtClean="0"/>
-              <a:t>1/27/13</a:t>
+              <a:t>6/4/26</a:t>
             </a:fld>
             <a:endParaRPr lang="en-US"/>
           </a:p>
@@ -3099,7 +3094,7 @@
 </file>
 
 <file path=ppt/slides/slide1.xml><?xml version="1.0" encoding="utf-8"?>
-<p:sld xmlns:a="http://schemas.openxmlformats.org/drawingml/2006/main" xmlns:p="http://schemas.openxmlformats.org/presentationml/2006/main" xmlns:r="http://schemas.openxmlformats.org/officeDocument/2006/relationships">
+<p:sld xmlns:a="http://schemas.openxmlformats.org/drawingml/2006/main" xmlns:r="http://schemas.openxmlformats.org/officeDocument/2006/relationships" xmlns:p="http://schemas.openxmlformats.org/presentationml/2006/main">
   <p:cSld>
     <p:bg>
       <p:bgPr>
@@ -3115,10 +3110,193 @@
         <p:cNvGrpSpPr/>
         <p:nvPr/>
       </p:nvGrpSpPr>
-      <p:grpSpPr/>
+      <p:grpSpPr>
+        <a:xfrm>
+          <a:off x="0" y="0"/>
+          <a:ext cx="0" cy="0"/>
+          <a:chOff x="0" y="0"/>
+          <a:chExt cx="0" cy="0"/>
+        </a:xfrm>
+      </p:grpSpPr>
+      <p:sp>
+        <p:nvSpPr>
+          <p:cNvPr id="3" name="Rectangle 2"/>
+          <p:cNvSpPr/>
+          <p:nvPr/>
+        </p:nvSpPr>
+        <p:spPr>
+          <a:xfrm>
+            <a:off x="0" y="0"/>
+            <a:ext cx="109728" cy="6858000"/>
+          </a:xfrm>
+          <a:prstGeom prst="rect">
+            <a:avLst/>
+          </a:prstGeom>
+          <a:solidFill>
+            <a:srgbClr val="F5C518"/>
+          </a:solidFill>
+          <a:ln>
+            <a:noFill/>
+          </a:ln>
+        </p:spPr>
+        <p:style>
+          <a:lnRef idx="1">
+            <a:schemeClr val="accent1"/>
+          </a:lnRef>
+          <a:fillRef idx="3">
+            <a:schemeClr val="accent1"/>
+          </a:fillRef>
+          <a:effectRef idx="2">
+            <a:schemeClr val="accent1"/>
+          </a:effectRef>
+          <a:fontRef idx="minor">
+            <a:schemeClr val="lt1"/>
+          </a:fontRef>
+        </p:style>
+        <p:txBody>
+          <a:bodyPr rtlCol="0" anchor="ctr"/>
+          <a:lstStyle/>
+          <a:p>
+            <a:pPr algn="ctr"/>
+            <a:endParaRPr/>
+          </a:p>
+        </p:txBody>
+      </p:sp>
+      <p:sp>
+        <p:nvSpPr>
+          <p:cNvPr id="4" name="Rectangle 3"/>
+          <p:cNvSpPr/>
+          <p:nvPr/>
+        </p:nvSpPr>
+        <p:spPr>
+          <a:xfrm>
+            <a:off x="0" y="6748272"/>
+            <a:ext cx="12188952" cy="109728"/>
+          </a:xfrm>
+          <a:prstGeom prst="rect">
+            <a:avLst/>
+          </a:prstGeom>
+          <a:solidFill>
+            <a:srgbClr val="F5C518"/>
+          </a:solidFill>
+          <a:ln>
+            <a:noFill/>
+          </a:ln>
+        </p:spPr>
+        <p:style>
+          <a:lnRef idx="1">
+            <a:schemeClr val="accent1"/>
+          </a:lnRef>
+          <a:fillRef idx="3">
+            <a:schemeClr val="accent1"/>
+          </a:fillRef>
+          <a:effectRef idx="2">
+            <a:schemeClr val="accent1"/>
+          </a:effectRef>
+          <a:fontRef idx="minor">
+            <a:schemeClr val="lt1"/>
+          </a:fontRef>
+        </p:style>
+        <p:txBody>
+          <a:bodyPr rtlCol="0" anchor="ctr"/>
+          <a:lstStyle/>
+          <a:p>
+            <a:pPr algn="ctr"/>
+            <a:endParaRPr/>
+          </a:p>
+        </p:txBody>
+      </p:sp>
+      <p:sp>
+        <p:nvSpPr>
+          <p:cNvPr id="5" name="Rectangle 4"/>
+          <p:cNvSpPr/>
+          <p:nvPr/>
+        </p:nvSpPr>
+        <p:spPr>
+          <a:xfrm>
+            <a:off x="7927848" y="0"/>
+            <a:ext cx="54864" cy="6858000"/>
+          </a:xfrm>
+          <a:prstGeom prst="rect">
+            <a:avLst/>
+          </a:prstGeom>
+          <a:solidFill>
+            <a:srgbClr val="F5C518"/>
+          </a:solidFill>
+          <a:ln>
+            <a:noFill/>
+          </a:ln>
+        </p:spPr>
+        <p:style>
+          <a:lnRef idx="1">
+            <a:schemeClr val="accent1"/>
+          </a:lnRef>
+          <a:fillRef idx="3">
+            <a:schemeClr val="accent1"/>
+          </a:fillRef>
+          <a:effectRef idx="2">
+            <a:schemeClr val="accent1"/>
+          </a:effectRef>
+          <a:fontRef idx="minor">
+            <a:schemeClr val="lt1"/>
+          </a:fontRef>
+        </p:style>
+        <p:txBody>
+          <a:bodyPr rtlCol="0" anchor="ctr"/>
+          <a:lstStyle/>
+          <a:p>
+            <a:pPr algn="ctr"/>
+            <a:endParaRPr/>
+          </a:p>
+        </p:txBody>
+      </p:sp>
+      <p:sp>
+        <p:nvSpPr>
+          <p:cNvPr id="6" name="Rectangle 5"/>
+          <p:cNvSpPr/>
+          <p:nvPr/>
+        </p:nvSpPr>
+        <p:spPr>
+          <a:xfrm>
+            <a:off x="109728" y="0"/>
+            <a:ext cx="7818120" cy="1828800"/>
+          </a:xfrm>
+          <a:prstGeom prst="rect">
+            <a:avLst/>
+          </a:prstGeom>
+          <a:solidFill>
+            <a:srgbClr val="111111"/>
+          </a:solidFill>
+          <a:ln>
+            <a:noFill/>
+          </a:ln>
+        </p:spPr>
+        <p:style>
+          <a:lnRef idx="1">
+            <a:schemeClr val="accent1"/>
+          </a:lnRef>
+          <a:fillRef idx="3">
+            <a:schemeClr val="accent1"/>
+          </a:fillRef>
+          <a:effectRef idx="2">
+            <a:schemeClr val="accent1"/>
+          </a:effectRef>
+          <a:fontRef idx="minor">
+            <a:schemeClr val="lt1"/>
+          </a:fontRef>
+        </p:style>
+        <p:txBody>
+          <a:bodyPr rtlCol="0" anchor="ctr"/>
+          <a:lstStyle/>
+          <a:p>
+            <a:pPr algn="ctr"/>
+            <a:endParaRPr/>
+          </a:p>
+        </p:txBody>
+      </p:sp>
       <p:pic>
         <p:nvPicPr>
-          <p:cNvPr id="2" name="Picture 1" descr="brazil_cover.jpeg"/>
+          <p:cNvPr id="7" name="Picture 6" descr="scwave-logo.png"/>
           <p:cNvPicPr>
             <a:picLocks noChangeAspect="1"/>
           </p:cNvPicPr>
@@ -3132,8 +3310,8 @@
         </p:blipFill>
         <p:spPr>
           <a:xfrm>
-            <a:off x="7982712" y="0"/>
-            <a:ext cx="4206240" cy="6858000"/>
+            <a:off x="411480" y="182880"/>
+            <a:ext cx="1600200" cy="1463040"/>
           </a:xfrm>
           <a:prstGeom prst="rect">
             <a:avLst/>
@@ -3142,179 +3320,112 @@
       </p:pic>
       <p:sp>
         <p:nvSpPr>
-          <p:cNvPr id="3" name="Rectangle 2"/>
-          <p:cNvSpPr/>
-          <p:nvPr/>
-        </p:nvSpPr>
-        <p:spPr>
-          <a:xfrm>
-            <a:off x="0" y="0"/>
-            <a:ext cx="109728" cy="6858000"/>
-          </a:xfrm>
-          <a:prstGeom prst="rect">
-            <a:avLst/>
-          </a:prstGeom>
-          <a:solidFill>
-            <a:srgbClr val="F5C518"/>
-          </a:solidFill>
-          <a:ln>
-            <a:noFill/>
-          </a:ln>
-        </p:spPr>
-        <p:style>
-          <a:lnRef idx="1">
-            <a:schemeClr val="accent1"/>
-          </a:lnRef>
-          <a:fillRef idx="3">
-            <a:schemeClr val="accent1"/>
-          </a:fillRef>
-          <a:effectRef idx="2">
-            <a:schemeClr val="accent1"/>
-          </a:effectRef>
-          <a:fontRef idx="minor">
-            <a:schemeClr val="lt1"/>
-          </a:fontRef>
-        </p:style>
-        <p:txBody>
-          <a:bodyPr rtlCol="0" anchor="ctr"/>
-          <a:lstStyle/>
-          <a:p>
-            <a:pPr algn="ctr"/>
-          </a:p>
-        </p:txBody>
-      </p:sp>
-      <p:sp>
-        <p:nvSpPr>
-          <p:cNvPr id="4" name="Rectangle 3"/>
-          <p:cNvSpPr/>
-          <p:nvPr/>
-        </p:nvSpPr>
-        <p:spPr>
-          <a:xfrm>
-            <a:off x="0" y="6748272"/>
-            <a:ext cx="12188952" cy="109728"/>
-          </a:xfrm>
-          <a:prstGeom prst="rect">
-            <a:avLst/>
-          </a:prstGeom>
-          <a:solidFill>
-            <a:srgbClr val="F5C518"/>
-          </a:solidFill>
-          <a:ln>
-            <a:noFill/>
-          </a:ln>
-        </p:spPr>
-        <p:style>
-          <a:lnRef idx="1">
-            <a:schemeClr val="accent1"/>
-          </a:lnRef>
-          <a:fillRef idx="3">
-            <a:schemeClr val="accent1"/>
-          </a:fillRef>
-          <a:effectRef idx="2">
-            <a:schemeClr val="accent1"/>
-          </a:effectRef>
-          <a:fontRef idx="minor">
-            <a:schemeClr val="lt1"/>
-          </a:fontRef>
-        </p:style>
-        <p:txBody>
-          <a:bodyPr rtlCol="0" anchor="ctr"/>
-          <a:lstStyle/>
-          <a:p>
-            <a:pPr algn="ctr"/>
-          </a:p>
-        </p:txBody>
-      </p:sp>
-      <p:sp>
-        <p:nvSpPr>
-          <p:cNvPr id="5" name="Rectangle 4"/>
-          <p:cNvSpPr/>
-          <p:nvPr/>
-        </p:nvSpPr>
-        <p:spPr>
-          <a:xfrm>
-            <a:off x="7927848" y="0"/>
-            <a:ext cx="54864" cy="6858000"/>
-          </a:xfrm>
-          <a:prstGeom prst="rect">
-            <a:avLst/>
-          </a:prstGeom>
-          <a:solidFill>
-            <a:srgbClr val="F5C518"/>
-          </a:solidFill>
-          <a:ln>
-            <a:noFill/>
-          </a:ln>
-        </p:spPr>
-        <p:style>
-          <a:lnRef idx="1">
-            <a:schemeClr val="accent1"/>
-          </a:lnRef>
-          <a:fillRef idx="3">
-            <a:schemeClr val="accent1"/>
-          </a:fillRef>
-          <a:effectRef idx="2">
-            <a:schemeClr val="accent1"/>
-          </a:effectRef>
-          <a:fontRef idx="minor">
-            <a:schemeClr val="lt1"/>
-          </a:fontRef>
-        </p:style>
-        <p:txBody>
-          <a:bodyPr rtlCol="0" anchor="ctr"/>
-          <a:lstStyle/>
-          <a:p>
-            <a:pPr algn="ctr"/>
-          </a:p>
-        </p:txBody>
-      </p:sp>
-      <p:sp>
-        <p:nvSpPr>
-          <p:cNvPr id="6" name="Rectangle 5"/>
-          <p:cNvSpPr/>
-          <p:nvPr/>
-        </p:nvSpPr>
-        <p:spPr>
-          <a:xfrm>
-            <a:off x="109728" y="0"/>
-            <a:ext cx="7818120" cy="1828800"/>
-          </a:xfrm>
-          <a:prstGeom prst="rect">
-            <a:avLst/>
-          </a:prstGeom>
-          <a:solidFill>
-            <a:srgbClr val="111111"/>
-          </a:solidFill>
-          <a:ln>
-            <a:noFill/>
-          </a:ln>
-        </p:spPr>
-        <p:style>
-          <a:lnRef idx="1">
-            <a:schemeClr val="accent1"/>
-          </a:lnRef>
-          <a:fillRef idx="3">
-            <a:schemeClr val="accent1"/>
-          </a:fillRef>
-          <a:effectRef idx="2">
-            <a:schemeClr val="accent1"/>
-          </a:effectRef>
-          <a:fontRef idx="minor">
-            <a:schemeClr val="lt1"/>
-          </a:fontRef>
-        </p:style>
-        <p:txBody>
-          <a:bodyPr rtlCol="0" anchor="ctr"/>
-          <a:lstStyle/>
-          <a:p>
-            <a:pPr algn="ctr"/>
+          <p:cNvPr id="8" name="TextBox 7"/>
+          <p:cNvSpPr txBox="1"/>
+          <p:nvPr/>
+        </p:nvSpPr>
+        <p:spPr>
+          <a:xfrm>
+            <a:off x="2194560" y="384048"/>
+            <a:ext cx="5559552" cy="457200"/>
+          </a:xfrm>
+          <a:prstGeom prst="rect">
+            <a:avLst/>
+          </a:prstGeom>
+          <a:noFill/>
+        </p:spPr>
+        <p:txBody>
+          <a:bodyPr wrap="square">
+            <a:spAutoFit/>
+          </a:bodyPr>
+          <a:lstStyle/>
+          <a:p>
+            <a:pPr algn="l"/>
+            <a:r>
+              <a:rPr sz="1400" b="1">
+                <a:solidFill>
+                  <a:srgbClr val="00D4E4"/>
+                </a:solidFill>
+                <a:latin typeface="Inter"/>
+              </a:rPr>
+              <a:t>SC WAVE SOCCER CLUB</a:t>
+            </a:r>
+          </a:p>
+        </p:txBody>
+      </p:sp>
+      <p:sp>
+        <p:nvSpPr>
+          <p:cNvPr id="9" name="TextBox 8"/>
+          <p:cNvSpPr txBox="1"/>
+          <p:nvPr/>
+        </p:nvSpPr>
+        <p:spPr>
+          <a:xfrm>
+            <a:off x="2194560" y="841248"/>
+            <a:ext cx="5559552" cy="365760"/>
+          </a:xfrm>
+          <a:prstGeom prst="rect">
+            <a:avLst/>
+          </a:prstGeom>
+          <a:noFill/>
+        </p:spPr>
+        <p:txBody>
+          <a:bodyPr wrap="square">
+            <a:spAutoFit/>
+          </a:bodyPr>
+          <a:lstStyle/>
+          <a:p>
+            <a:pPr algn="l"/>
+            <a:r>
+              <a:rPr sz="1100" b="0">
+                <a:solidFill>
+                  <a:srgbClr val="AAAAAA"/>
+                </a:solidFill>
+                <a:latin typeface="Inter"/>
+              </a:rPr>
+              <a:t>MLS NEXT  ·  Player Development</a:t>
+            </a:r>
+          </a:p>
+        </p:txBody>
+      </p:sp>
+      <p:sp>
+        <p:nvSpPr>
+          <p:cNvPr id="10" name="TextBox 9"/>
+          <p:cNvSpPr txBox="1"/>
+          <p:nvPr/>
+        </p:nvSpPr>
+        <p:spPr>
+          <a:xfrm>
+            <a:off x="814388" y="2304288"/>
+            <a:ext cx="7296912" cy="1169551"/>
+          </a:xfrm>
+          <a:prstGeom prst="rect">
+            <a:avLst/>
+          </a:prstGeom>
+          <a:noFill/>
+        </p:spPr>
+        <p:txBody>
+          <a:bodyPr wrap="square">
+            <a:spAutoFit/>
+          </a:bodyPr>
+          <a:lstStyle/>
+          <a:p>
+            <a:pPr algn="l"/>
+            <a:r>
+              <a:rPr sz="7000" b="1" dirty="0">
+                <a:solidFill>
+                  <a:srgbClr val="F5C518"/>
+                </a:solidFill>
+                <a:latin typeface="Barlow Condensed"/>
+              </a:rPr>
+              <a:t>CLUB MODEL</a:t>
+            </a:r>
           </a:p>
         </p:txBody>
       </p:sp>
       <p:pic>
         <p:nvPicPr>
-          <p:cNvPr id="7" name="Picture 6" descr="scwave-logo.png"/>
+          <p:cNvPr id="11" name="Picture 10" descr="mlsnext-logo.png"/>
           <p:cNvPicPr>
             <a:picLocks noChangeAspect="1"/>
           </p:cNvPicPr>
@@ -3328,178 +3439,14 @@
         </p:blipFill>
         <p:spPr>
           <a:xfrm>
-            <a:off x="411480" y="182880"/>
-            <a:ext cx="1600200" cy="1463040"/>
+            <a:off x="2194560" y="4572000"/>
+            <a:ext cx="2651760" cy="1873377"/>
           </a:xfrm>
           <a:prstGeom prst="rect">
             <a:avLst/>
           </a:prstGeom>
         </p:spPr>
       </p:pic>
-      <p:sp>
-        <p:nvSpPr>
-          <p:cNvPr id="8" name="TextBox 7"/>
-          <p:cNvSpPr txBox="1"/>
-          <p:nvPr/>
-        </p:nvSpPr>
-        <p:spPr>
-          <a:xfrm>
-            <a:off x="2194560" y="384048"/>
-            <a:ext cx="5559552" cy="457200"/>
-          </a:xfrm>
-          <a:prstGeom prst="rect">
-            <a:avLst/>
-          </a:prstGeom>
-          <a:noFill/>
-        </p:spPr>
-        <p:txBody>
-          <a:bodyPr wrap="square">
-            <a:spAutoFit/>
-          </a:bodyPr>
-          <a:lstStyle/>
-          <a:p>
-            <a:pPr algn="l"/>
-            <a:r>
-              <a:rPr sz="1400" b="1">
-                <a:solidFill>
-                  <a:srgbClr val="00D4E4"/>
-                </a:solidFill>
-                <a:latin typeface="Inter"/>
-              </a:rPr>
-              <a:t>SC WAVE SOCCER CLUB</a:t>
-            </a:r>
-          </a:p>
-        </p:txBody>
-      </p:sp>
-      <p:sp>
-        <p:nvSpPr>
-          <p:cNvPr id="9" name="TextBox 8"/>
-          <p:cNvSpPr txBox="1"/>
-          <p:nvPr/>
-        </p:nvSpPr>
-        <p:spPr>
-          <a:xfrm>
-            <a:off x="2194560" y="841248"/>
-            <a:ext cx="5559552" cy="365760"/>
-          </a:xfrm>
-          <a:prstGeom prst="rect">
-            <a:avLst/>
-          </a:prstGeom>
-          <a:noFill/>
-        </p:spPr>
-        <p:txBody>
-          <a:bodyPr wrap="square">
-            <a:spAutoFit/>
-          </a:bodyPr>
-          <a:lstStyle/>
-          <a:p>
-            <a:pPr algn="l"/>
-            <a:r>
-              <a:rPr sz="1100" b="0">
-                <a:solidFill>
-                  <a:srgbClr val="AAAAAA"/>
-                </a:solidFill>
-                <a:latin typeface="Inter"/>
-              </a:rPr>
-              <a:t>MLS NEXT  ·  Player Development</a:t>
-            </a:r>
-          </a:p>
-        </p:txBody>
-      </p:sp>
-      <p:sp>
-        <p:nvSpPr>
-          <p:cNvPr id="10" name="TextBox 9"/>
-          <p:cNvSpPr txBox="1"/>
-          <p:nvPr/>
-        </p:nvSpPr>
-        <p:spPr>
-          <a:xfrm>
-            <a:off x="457200" y="2103120"/>
-            <a:ext cx="7296912" cy="1280160"/>
-          </a:xfrm>
-          <a:prstGeom prst="rect">
-            <a:avLst/>
-          </a:prstGeom>
-          <a:noFill/>
-        </p:spPr>
-        <p:txBody>
-          <a:bodyPr wrap="square">
-            <a:spAutoFit/>
-          </a:bodyPr>
-          <a:lstStyle/>
-          <a:p>
-            <a:pPr algn="l"/>
-            <a:r>
-              <a:rPr sz="7000" b="1">
-                <a:solidFill>
-                  <a:srgbClr val="F5C518"/>
-                </a:solidFill>
-                <a:latin typeface="Barlow Condensed"/>
-              </a:rPr>
-              <a:t>CLUB GAME MODEL</a:t>
-            </a:r>
-          </a:p>
-        </p:txBody>
-      </p:sp>
-      <p:pic>
-        <p:nvPicPr>
-          <p:cNvPr id="11" name="Picture 10" descr="mlsnext-logo.png"/>
-          <p:cNvPicPr>
-            <a:picLocks noChangeAspect="1"/>
-          </p:cNvPicPr>
-          <p:nvPr/>
-        </p:nvPicPr>
-        <p:blipFill>
-          <a:blip r:embed="rId4"/>
-          <a:stretch>
-            <a:fillRect/>
-          </a:stretch>
-        </p:blipFill>
-        <p:spPr>
-          <a:xfrm>
-            <a:off x="457200" y="6016752"/>
-            <a:ext cx="2651760" cy="685800"/>
-          </a:xfrm>
-          <a:prstGeom prst="rect">
-            <a:avLst/>
-          </a:prstGeom>
-        </p:spPr>
-      </p:pic>
-      <p:sp>
-        <p:nvSpPr>
-          <p:cNvPr id="12" name="TextBox 11"/>
-          <p:cNvSpPr txBox="1"/>
-          <p:nvPr/>
-        </p:nvSpPr>
-        <p:spPr>
-          <a:xfrm>
-            <a:off x="3291840" y="6080760"/>
-            <a:ext cx="4919472" cy="548640"/>
-          </a:xfrm>
-          <a:prstGeom prst="rect">
-            <a:avLst/>
-          </a:prstGeom>
-          <a:noFill/>
-        </p:spPr>
-        <p:txBody>
-          <a:bodyPr wrap="square">
-            <a:spAutoFit/>
-          </a:bodyPr>
-          <a:lstStyle/>
-          <a:p>
-            <a:pPr algn="l"/>
-            <a:r>
-              <a:rPr sz="1200" b="0">
-                <a:solidFill>
-                  <a:srgbClr val="AAAAAA"/>
-                </a:solidFill>
-                <a:latin typeface="Inter"/>
-              </a:rPr>
-              <a:t>2025 — 2026 SEASON</a:t>
-            </a:r>
-          </a:p>
-        </p:txBody>
-      </p:sp>
     </p:spTree>
   </p:cSld>
   <p:clrMapOvr>
@@ -3509,7 +3456,7 @@
 </file>
 
 <file path=ppt/slides/slide10.xml><?xml version="1.0" encoding="utf-8"?>
-<p:sld xmlns:a="http://schemas.openxmlformats.org/drawingml/2006/main" xmlns:p="http://schemas.openxmlformats.org/presentationml/2006/main" xmlns:r="http://schemas.openxmlformats.org/officeDocument/2006/relationships">
+<p:sld xmlns:a="http://schemas.openxmlformats.org/drawingml/2006/main" xmlns:r="http://schemas.openxmlformats.org/officeDocument/2006/relationships" xmlns:p="http://schemas.openxmlformats.org/presentationml/2006/main">
   <p:cSld>
     <p:bg>
       <p:bgPr>
@@ -3525,7 +3472,14 @@
         <p:cNvGrpSpPr/>
         <p:nvPr/>
       </p:nvGrpSpPr>
-      <p:grpSpPr/>
+      <p:grpSpPr>
+        <a:xfrm>
+          <a:off x="0" y="0"/>
+          <a:ext cx="0" cy="0"/>
+          <a:chOff x="0" y="0"/>
+          <a:chExt cx="0" cy="0"/>
+        </a:xfrm>
+      </p:grpSpPr>
       <p:sp>
         <p:nvSpPr>
           <p:cNvPr id="2" name="Rectangle 1"/>
@@ -3566,6 +3520,7 @@
           <a:lstStyle/>
           <a:p>
             <a:pPr algn="ctr"/>
+            <a:endParaRPr/>
           </a:p>
         </p:txBody>
       </p:sp>
@@ -3623,9 +3578,27 @@
                 <a:tableStyleId>{5C22544A-7EE6-4342-B048-85BDC9FD1C3A}</a:tableStyleId>
               </a:tblPr>
               <a:tblGrid>
-                <a:gridCol w="1325880"/>
-                <a:gridCol w="4974336"/>
-                <a:gridCol w="4974336"/>
+                <a:gridCol w="1325880">
+                  <a:extLst>
+                    <a:ext uri="{9D8B030D-6E8A-4147-A177-3AD203B41FA5}">
+                      <a16:colId xmlns:a16="http://schemas.microsoft.com/office/drawing/2014/main" val="20000"/>
+                    </a:ext>
+                  </a:extLst>
+                </a:gridCol>
+                <a:gridCol w="4974336">
+                  <a:extLst>
+                    <a:ext uri="{9D8B030D-6E8A-4147-A177-3AD203B41FA5}">
+                      <a16:colId xmlns:a16="http://schemas.microsoft.com/office/drawing/2014/main" val="20001"/>
+                    </a:ext>
+                  </a:extLst>
+                </a:gridCol>
+                <a:gridCol w="4974336">
+                  <a:extLst>
+                    <a:ext uri="{9D8B030D-6E8A-4147-A177-3AD203B41FA5}">
+                      <a16:colId xmlns:a16="http://schemas.microsoft.com/office/drawing/2014/main" val="20002"/>
+                    </a:ext>
+                  </a:extLst>
+                </a:gridCol>
               </a:tblGrid>
               <a:tr h="1405890">
                 <a:tc>
@@ -3697,11 +3670,16 @@
                     </a:solidFill>
                   </a:tcPr>
                 </a:tc>
+                <a:extLst>
+                  <a:ext uri="{0D108BD9-81ED-4DB2-BD59-A6C34878D82A}">
+                    <a16:rowId xmlns:a16="http://schemas.microsoft.com/office/drawing/2014/main" val="10000"/>
+                  </a:ext>
+                </a:extLst>
               </a:tr>
               <a:tr h="1405890">
                 <a:tc>
                   <a:txBody>
-                    <a:bodyPr wrap="square"/>
+                    <a:bodyPr/>
                     <a:lstStyle/>
                     <a:p>
                       <a:pPr algn="ctr"/>
@@ -3724,7 +3702,7 @@
                 </a:tc>
                 <a:tc>
                   <a:txBody>
-                    <a:bodyPr wrap="square"/>
+                    <a:bodyPr/>
                     <a:lstStyle/>
                     <a:p>
                       <a:pPr algn="l"/>
@@ -3747,7 +3725,7 @@
                 </a:tc>
                 <a:tc>
                   <a:txBody>
-                    <a:bodyPr wrap="square"/>
+                    <a:bodyPr/>
                     <a:lstStyle/>
                     <a:p>
                       <a:pPr algn="l"/>
@@ -3768,11 +3746,16 @@
                     </a:solidFill>
                   </a:tcPr>
                 </a:tc>
+                <a:extLst>
+                  <a:ext uri="{0D108BD9-81ED-4DB2-BD59-A6C34878D82A}">
+                    <a16:rowId xmlns:a16="http://schemas.microsoft.com/office/drawing/2014/main" val="10001"/>
+                  </a:ext>
+                </a:extLst>
               </a:tr>
               <a:tr h="1405890">
                 <a:tc>
                   <a:txBody>
-                    <a:bodyPr wrap="square"/>
+                    <a:bodyPr/>
                     <a:lstStyle/>
                     <a:p>
                       <a:pPr algn="ctr"/>
@@ -3795,7 +3778,7 @@
                 </a:tc>
                 <a:tc>
                   <a:txBody>
-                    <a:bodyPr wrap="square"/>
+                    <a:bodyPr/>
                     <a:lstStyle/>
                     <a:p>
                       <a:pPr algn="l"/>
@@ -3818,7 +3801,7 @@
                 </a:tc>
                 <a:tc>
                   <a:txBody>
-                    <a:bodyPr wrap="square"/>
+                    <a:bodyPr/>
                     <a:lstStyle/>
                     <a:p>
                       <a:pPr algn="l"/>
@@ -3839,11 +3822,16 @@
                     </a:solidFill>
                   </a:tcPr>
                 </a:tc>
+                <a:extLst>
+                  <a:ext uri="{0D108BD9-81ED-4DB2-BD59-A6C34878D82A}">
+                    <a16:rowId xmlns:a16="http://schemas.microsoft.com/office/drawing/2014/main" val="10002"/>
+                  </a:ext>
+                </a:extLst>
               </a:tr>
               <a:tr h="1405890">
                 <a:tc>
                   <a:txBody>
-                    <a:bodyPr wrap="square"/>
+                    <a:bodyPr/>
                     <a:lstStyle/>
                     <a:p>
                       <a:pPr algn="ctr"/>
@@ -3866,7 +3854,7 @@
                 </a:tc>
                 <a:tc>
                   <a:txBody>
-                    <a:bodyPr wrap="square"/>
+                    <a:bodyPr/>
                     <a:lstStyle/>
                     <a:p>
                       <a:pPr algn="l"/>
@@ -3889,7 +3877,7 @@
                 </a:tc>
                 <a:tc>
                   <a:txBody>
-                    <a:bodyPr wrap="square"/>
+                    <a:bodyPr/>
                     <a:lstStyle/>
                     <a:p>
                       <a:pPr algn="l"/>
@@ -3910,6 +3898,11 @@
                     </a:solidFill>
                   </a:tcPr>
                 </a:tc>
+                <a:extLst>
+                  <a:ext uri="{0D108BD9-81ED-4DB2-BD59-A6C34878D82A}">
+                    <a16:rowId xmlns:a16="http://schemas.microsoft.com/office/drawing/2014/main" val="10003"/>
+                  </a:ext>
+                </a:extLst>
               </a:tr>
             </a:tbl>
           </a:graphicData>
@@ -3924,7 +3917,7 @@
 </file>
 
 <file path=ppt/slides/slide11.xml><?xml version="1.0" encoding="utf-8"?>
-<p:sld xmlns:a="http://schemas.openxmlformats.org/drawingml/2006/main" xmlns:p="http://schemas.openxmlformats.org/presentationml/2006/main" xmlns:r="http://schemas.openxmlformats.org/officeDocument/2006/relationships">
+<p:sld xmlns:a="http://schemas.openxmlformats.org/drawingml/2006/main" xmlns:r="http://schemas.openxmlformats.org/officeDocument/2006/relationships" xmlns:p="http://schemas.openxmlformats.org/presentationml/2006/main">
   <p:cSld>
     <p:bg>
       <p:bgPr>
@@ -3940,7 +3933,14 @@
         <p:cNvGrpSpPr/>
         <p:nvPr/>
       </p:nvGrpSpPr>
-      <p:grpSpPr/>
+      <p:grpSpPr>
+        <a:xfrm>
+          <a:off x="0" y="0"/>
+          <a:ext cx="0" cy="0"/>
+          <a:chOff x="0" y="0"/>
+          <a:chExt cx="0" cy="0"/>
+        </a:xfrm>
+      </p:grpSpPr>
       <p:sp>
         <p:nvSpPr>
           <p:cNvPr id="2" name="Rectangle 1"/>
@@ -3981,6 +3981,7 @@
           <a:lstStyle/>
           <a:p>
             <a:pPr algn="ctr"/>
+            <a:endParaRPr/>
           </a:p>
         </p:txBody>
       </p:sp>
@@ -4038,9 +4039,27 @@
                 <a:tableStyleId>{5C22544A-7EE6-4342-B048-85BDC9FD1C3A}</a:tableStyleId>
               </a:tblPr>
               <a:tblGrid>
-                <a:gridCol w="1325880"/>
-                <a:gridCol w="4974336"/>
-                <a:gridCol w="4974336"/>
+                <a:gridCol w="1325880">
+                  <a:extLst>
+                    <a:ext uri="{9D8B030D-6E8A-4147-A177-3AD203B41FA5}">
+                      <a16:colId xmlns:a16="http://schemas.microsoft.com/office/drawing/2014/main" val="20000"/>
+                    </a:ext>
+                  </a:extLst>
+                </a:gridCol>
+                <a:gridCol w="4974336">
+                  <a:extLst>
+                    <a:ext uri="{9D8B030D-6E8A-4147-A177-3AD203B41FA5}">
+                      <a16:colId xmlns:a16="http://schemas.microsoft.com/office/drawing/2014/main" val="20001"/>
+                    </a:ext>
+                  </a:extLst>
+                </a:gridCol>
+                <a:gridCol w="4974336">
+                  <a:extLst>
+                    <a:ext uri="{9D8B030D-6E8A-4147-A177-3AD203B41FA5}">
+                      <a16:colId xmlns:a16="http://schemas.microsoft.com/office/drawing/2014/main" val="20002"/>
+                    </a:ext>
+                  </a:extLst>
+                </a:gridCol>
               </a:tblGrid>
               <a:tr h="1405890">
                 <a:tc>
@@ -4112,11 +4131,16 @@
                     </a:solidFill>
                   </a:tcPr>
                 </a:tc>
+                <a:extLst>
+                  <a:ext uri="{0D108BD9-81ED-4DB2-BD59-A6C34878D82A}">
+                    <a16:rowId xmlns:a16="http://schemas.microsoft.com/office/drawing/2014/main" val="10000"/>
+                  </a:ext>
+                </a:extLst>
               </a:tr>
               <a:tr h="1405890">
                 <a:tc>
                   <a:txBody>
-                    <a:bodyPr wrap="square"/>
+                    <a:bodyPr/>
                     <a:lstStyle/>
                     <a:p>
                       <a:pPr algn="ctr"/>
@@ -4139,7 +4163,7 @@
                 </a:tc>
                 <a:tc>
                   <a:txBody>
-                    <a:bodyPr wrap="square"/>
+                    <a:bodyPr/>
                     <a:lstStyle/>
                     <a:p>
                       <a:pPr algn="l"/>
@@ -4162,7 +4186,7 @@
                 </a:tc>
                 <a:tc>
                   <a:txBody>
-                    <a:bodyPr wrap="square"/>
+                    <a:bodyPr/>
                     <a:lstStyle/>
                     <a:p>
                       <a:pPr algn="l"/>
@@ -4183,11 +4207,16 @@
                     </a:solidFill>
                   </a:tcPr>
                 </a:tc>
+                <a:extLst>
+                  <a:ext uri="{0D108BD9-81ED-4DB2-BD59-A6C34878D82A}">
+                    <a16:rowId xmlns:a16="http://schemas.microsoft.com/office/drawing/2014/main" val="10001"/>
+                  </a:ext>
+                </a:extLst>
               </a:tr>
               <a:tr h="1405890">
                 <a:tc>
                   <a:txBody>
-                    <a:bodyPr wrap="square"/>
+                    <a:bodyPr/>
                     <a:lstStyle/>
                     <a:p>
                       <a:pPr algn="ctr"/>
@@ -4210,7 +4239,7 @@
                 </a:tc>
                 <a:tc>
                   <a:txBody>
-                    <a:bodyPr wrap="square"/>
+                    <a:bodyPr/>
                     <a:lstStyle/>
                     <a:p>
                       <a:pPr algn="l"/>
@@ -4233,7 +4262,7 @@
                 </a:tc>
                 <a:tc>
                   <a:txBody>
-                    <a:bodyPr wrap="square"/>
+                    <a:bodyPr/>
                     <a:lstStyle/>
                     <a:p>
                       <a:pPr algn="l"/>
@@ -4254,11 +4283,16 @@
                     </a:solidFill>
                   </a:tcPr>
                 </a:tc>
+                <a:extLst>
+                  <a:ext uri="{0D108BD9-81ED-4DB2-BD59-A6C34878D82A}">
+                    <a16:rowId xmlns:a16="http://schemas.microsoft.com/office/drawing/2014/main" val="10002"/>
+                  </a:ext>
+                </a:extLst>
               </a:tr>
               <a:tr h="1405890">
                 <a:tc>
                   <a:txBody>
-                    <a:bodyPr wrap="square"/>
+                    <a:bodyPr/>
                     <a:lstStyle/>
                     <a:p>
                       <a:pPr algn="ctr"/>
@@ -4281,7 +4315,7 @@
                 </a:tc>
                 <a:tc>
                   <a:txBody>
-                    <a:bodyPr wrap="square"/>
+                    <a:bodyPr/>
                     <a:lstStyle/>
                     <a:p>
                       <a:pPr algn="l"/>
@@ -4304,7 +4338,7 @@
                 </a:tc>
                 <a:tc>
                   <a:txBody>
-                    <a:bodyPr wrap="square"/>
+                    <a:bodyPr/>
                     <a:lstStyle/>
                     <a:p>
                       <a:pPr algn="l"/>
@@ -4325,6 +4359,11 @@
                     </a:solidFill>
                   </a:tcPr>
                 </a:tc>
+                <a:extLst>
+                  <a:ext uri="{0D108BD9-81ED-4DB2-BD59-A6C34878D82A}">
+                    <a16:rowId xmlns:a16="http://schemas.microsoft.com/office/drawing/2014/main" val="10003"/>
+                  </a:ext>
+                </a:extLst>
               </a:tr>
             </a:tbl>
           </a:graphicData>
@@ -4339,7 +4378,7 @@
 </file>
 
 <file path=ppt/slides/slide12.xml><?xml version="1.0" encoding="utf-8"?>
-<p:sld xmlns:a="http://schemas.openxmlformats.org/drawingml/2006/main" xmlns:p="http://schemas.openxmlformats.org/presentationml/2006/main" xmlns:r="http://schemas.openxmlformats.org/officeDocument/2006/relationships">
+<p:sld xmlns:a="http://schemas.openxmlformats.org/drawingml/2006/main" xmlns:r="http://schemas.openxmlformats.org/officeDocument/2006/relationships" xmlns:p="http://schemas.openxmlformats.org/presentationml/2006/main">
   <p:cSld>
     <p:bg>
       <p:bgPr>
@@ -4355,7 +4394,14 @@
         <p:cNvGrpSpPr/>
         <p:nvPr/>
       </p:nvGrpSpPr>
-      <p:grpSpPr/>
+      <p:grpSpPr>
+        <a:xfrm>
+          <a:off x="0" y="0"/>
+          <a:ext cx="0" cy="0"/>
+          <a:chOff x="0" y="0"/>
+          <a:chExt cx="0" cy="0"/>
+        </a:xfrm>
+      </p:grpSpPr>
       <p:sp>
         <p:nvSpPr>
           <p:cNvPr id="2" name="Rectangle 1"/>
@@ -4396,6 +4442,7 @@
           <a:lstStyle/>
           <a:p>
             <a:pPr algn="ctr"/>
+            <a:endParaRPr/>
           </a:p>
         </p:txBody>
       </p:sp>
@@ -4453,9 +4500,27 @@
                 <a:tableStyleId>{5C22544A-7EE6-4342-B048-85BDC9FD1C3A}</a:tableStyleId>
               </a:tblPr>
               <a:tblGrid>
-                <a:gridCol w="1325880"/>
-                <a:gridCol w="4974336"/>
-                <a:gridCol w="4974336"/>
+                <a:gridCol w="1325880">
+                  <a:extLst>
+                    <a:ext uri="{9D8B030D-6E8A-4147-A177-3AD203B41FA5}">
+                      <a16:colId xmlns:a16="http://schemas.microsoft.com/office/drawing/2014/main" val="20000"/>
+                    </a:ext>
+                  </a:extLst>
+                </a:gridCol>
+                <a:gridCol w="4974336">
+                  <a:extLst>
+                    <a:ext uri="{9D8B030D-6E8A-4147-A177-3AD203B41FA5}">
+                      <a16:colId xmlns:a16="http://schemas.microsoft.com/office/drawing/2014/main" val="20001"/>
+                    </a:ext>
+                  </a:extLst>
+                </a:gridCol>
+                <a:gridCol w="4974336">
+                  <a:extLst>
+                    <a:ext uri="{9D8B030D-6E8A-4147-A177-3AD203B41FA5}">
+                      <a16:colId xmlns:a16="http://schemas.microsoft.com/office/drawing/2014/main" val="20002"/>
+                    </a:ext>
+                  </a:extLst>
+                </a:gridCol>
               </a:tblGrid>
               <a:tr h="1405890">
                 <a:tc>
@@ -4527,11 +4592,16 @@
                     </a:solidFill>
                   </a:tcPr>
                 </a:tc>
+                <a:extLst>
+                  <a:ext uri="{0D108BD9-81ED-4DB2-BD59-A6C34878D82A}">
+                    <a16:rowId xmlns:a16="http://schemas.microsoft.com/office/drawing/2014/main" val="10000"/>
+                  </a:ext>
+                </a:extLst>
               </a:tr>
               <a:tr h="1405890">
                 <a:tc>
                   <a:txBody>
-                    <a:bodyPr wrap="square"/>
+                    <a:bodyPr/>
                     <a:lstStyle/>
                     <a:p>
                       <a:pPr algn="ctr"/>
@@ -4554,7 +4624,7 @@
                 </a:tc>
                 <a:tc>
                   <a:txBody>
-                    <a:bodyPr wrap="square"/>
+                    <a:bodyPr/>
                     <a:lstStyle/>
                     <a:p>
                       <a:pPr algn="l"/>
@@ -4577,7 +4647,7 @@
                 </a:tc>
                 <a:tc>
                   <a:txBody>
-                    <a:bodyPr wrap="square"/>
+                    <a:bodyPr/>
                     <a:lstStyle/>
                     <a:p>
                       <a:pPr algn="l"/>
@@ -4598,11 +4668,16 @@
                     </a:solidFill>
                   </a:tcPr>
                 </a:tc>
+                <a:extLst>
+                  <a:ext uri="{0D108BD9-81ED-4DB2-BD59-A6C34878D82A}">
+                    <a16:rowId xmlns:a16="http://schemas.microsoft.com/office/drawing/2014/main" val="10001"/>
+                  </a:ext>
+                </a:extLst>
               </a:tr>
               <a:tr h="1405890">
                 <a:tc>
                   <a:txBody>
-                    <a:bodyPr wrap="square"/>
+                    <a:bodyPr/>
                     <a:lstStyle/>
                     <a:p>
                       <a:pPr algn="ctr"/>
@@ -4625,7 +4700,7 @@
                 </a:tc>
                 <a:tc>
                   <a:txBody>
-                    <a:bodyPr wrap="square"/>
+                    <a:bodyPr/>
                     <a:lstStyle/>
                     <a:p>
                       <a:pPr algn="l"/>
@@ -4648,7 +4723,7 @@
                 </a:tc>
                 <a:tc>
                   <a:txBody>
-                    <a:bodyPr wrap="square"/>
+                    <a:bodyPr/>
                     <a:lstStyle/>
                     <a:p>
                       <a:pPr algn="l"/>
@@ -4669,11 +4744,16 @@
                     </a:solidFill>
                   </a:tcPr>
                 </a:tc>
+                <a:extLst>
+                  <a:ext uri="{0D108BD9-81ED-4DB2-BD59-A6C34878D82A}">
+                    <a16:rowId xmlns:a16="http://schemas.microsoft.com/office/drawing/2014/main" val="10002"/>
+                  </a:ext>
+                </a:extLst>
               </a:tr>
               <a:tr h="1405890">
                 <a:tc>
                   <a:txBody>
-                    <a:bodyPr wrap="square"/>
+                    <a:bodyPr/>
                     <a:lstStyle/>
                     <a:p>
                       <a:pPr algn="ctr"/>
@@ -4696,7 +4776,7 @@
                 </a:tc>
                 <a:tc>
                   <a:txBody>
-                    <a:bodyPr wrap="square"/>
+                    <a:bodyPr/>
                     <a:lstStyle/>
                     <a:p>
                       <a:pPr algn="l"/>
@@ -4719,7 +4799,7 @@
                 </a:tc>
                 <a:tc>
                   <a:txBody>
-                    <a:bodyPr wrap="square"/>
+                    <a:bodyPr/>
                     <a:lstStyle/>
                     <a:p>
                       <a:pPr algn="l"/>
@@ -4740,6 +4820,11 @@
                     </a:solidFill>
                   </a:tcPr>
                 </a:tc>
+                <a:extLst>
+                  <a:ext uri="{0D108BD9-81ED-4DB2-BD59-A6C34878D82A}">
+                    <a16:rowId xmlns:a16="http://schemas.microsoft.com/office/drawing/2014/main" val="10003"/>
+                  </a:ext>
+                </a:extLst>
               </a:tr>
             </a:tbl>
           </a:graphicData>
@@ -4754,7 +4839,7 @@
 </file>
 
 <file path=ppt/slides/slide13.xml><?xml version="1.0" encoding="utf-8"?>
-<p:sld xmlns:a="http://schemas.openxmlformats.org/drawingml/2006/main" xmlns:p="http://schemas.openxmlformats.org/presentationml/2006/main" xmlns:r="http://schemas.openxmlformats.org/officeDocument/2006/relationships">
+<p:sld xmlns:a="http://schemas.openxmlformats.org/drawingml/2006/main" xmlns:r="http://schemas.openxmlformats.org/officeDocument/2006/relationships" xmlns:p="http://schemas.openxmlformats.org/presentationml/2006/main">
   <p:cSld>
     <p:bg>
       <p:bgPr>
@@ -4770,7 +4855,14 @@
         <p:cNvGrpSpPr/>
         <p:nvPr/>
       </p:nvGrpSpPr>
-      <p:grpSpPr/>
+      <p:grpSpPr>
+        <a:xfrm>
+          <a:off x="0" y="0"/>
+          <a:ext cx="0" cy="0"/>
+          <a:chOff x="0" y="0"/>
+          <a:chExt cx="0" cy="0"/>
+        </a:xfrm>
+      </p:grpSpPr>
       <p:sp>
         <p:nvSpPr>
           <p:cNvPr id="2" name="Rectangle 1"/>
@@ -4811,6 +4903,7 @@
           <a:lstStyle/>
           <a:p>
             <a:pPr algn="ctr"/>
+            <a:endParaRPr/>
           </a:p>
         </p:txBody>
       </p:sp>
@@ -4868,9 +4961,27 @@
                 <a:tableStyleId>{5C22544A-7EE6-4342-B048-85BDC9FD1C3A}</a:tableStyleId>
               </a:tblPr>
               <a:tblGrid>
-                <a:gridCol w="1325880"/>
-                <a:gridCol w="4974336"/>
-                <a:gridCol w="4974336"/>
+                <a:gridCol w="1325880">
+                  <a:extLst>
+                    <a:ext uri="{9D8B030D-6E8A-4147-A177-3AD203B41FA5}">
+                      <a16:colId xmlns:a16="http://schemas.microsoft.com/office/drawing/2014/main" val="20000"/>
+                    </a:ext>
+                  </a:extLst>
+                </a:gridCol>
+                <a:gridCol w="4974336">
+                  <a:extLst>
+                    <a:ext uri="{9D8B030D-6E8A-4147-A177-3AD203B41FA5}">
+                      <a16:colId xmlns:a16="http://schemas.microsoft.com/office/drawing/2014/main" val="20001"/>
+                    </a:ext>
+                  </a:extLst>
+                </a:gridCol>
+                <a:gridCol w="4974336">
+                  <a:extLst>
+                    <a:ext uri="{9D8B030D-6E8A-4147-A177-3AD203B41FA5}">
+                      <a16:colId xmlns:a16="http://schemas.microsoft.com/office/drawing/2014/main" val="20002"/>
+                    </a:ext>
+                  </a:extLst>
+                </a:gridCol>
               </a:tblGrid>
               <a:tr h="1405890">
                 <a:tc>
@@ -4942,11 +5053,16 @@
                     </a:solidFill>
                   </a:tcPr>
                 </a:tc>
+                <a:extLst>
+                  <a:ext uri="{0D108BD9-81ED-4DB2-BD59-A6C34878D82A}">
+                    <a16:rowId xmlns:a16="http://schemas.microsoft.com/office/drawing/2014/main" val="10000"/>
+                  </a:ext>
+                </a:extLst>
               </a:tr>
               <a:tr h="1405890">
                 <a:tc>
                   <a:txBody>
-                    <a:bodyPr wrap="square"/>
+                    <a:bodyPr/>
                     <a:lstStyle/>
                     <a:p>
                       <a:pPr algn="ctr"/>
@@ -4969,7 +5085,7 @@
                 </a:tc>
                 <a:tc>
                   <a:txBody>
-                    <a:bodyPr wrap="square"/>
+                    <a:bodyPr/>
                     <a:lstStyle/>
                     <a:p>
                       <a:pPr algn="l"/>
@@ -4992,7 +5108,7 @@
                 </a:tc>
                 <a:tc>
                   <a:txBody>
-                    <a:bodyPr wrap="square"/>
+                    <a:bodyPr/>
                     <a:lstStyle/>
                     <a:p>
                       <a:pPr algn="l"/>
@@ -5013,11 +5129,16 @@
                     </a:solidFill>
                   </a:tcPr>
                 </a:tc>
+                <a:extLst>
+                  <a:ext uri="{0D108BD9-81ED-4DB2-BD59-A6C34878D82A}">
+                    <a16:rowId xmlns:a16="http://schemas.microsoft.com/office/drawing/2014/main" val="10001"/>
+                  </a:ext>
+                </a:extLst>
               </a:tr>
               <a:tr h="1405890">
                 <a:tc>
                   <a:txBody>
-                    <a:bodyPr wrap="square"/>
+                    <a:bodyPr/>
                     <a:lstStyle/>
                     <a:p>
                       <a:pPr algn="ctr"/>
@@ -5040,7 +5161,7 @@
                 </a:tc>
                 <a:tc>
                   <a:txBody>
-                    <a:bodyPr wrap="square"/>
+                    <a:bodyPr/>
                     <a:lstStyle/>
                     <a:p>
                       <a:pPr algn="l"/>
@@ -5063,7 +5184,7 @@
                 </a:tc>
                 <a:tc>
                   <a:txBody>
-                    <a:bodyPr wrap="square"/>
+                    <a:bodyPr/>
                     <a:lstStyle/>
                     <a:p>
                       <a:pPr algn="l"/>
@@ -5084,11 +5205,16 @@
                     </a:solidFill>
                   </a:tcPr>
                 </a:tc>
+                <a:extLst>
+                  <a:ext uri="{0D108BD9-81ED-4DB2-BD59-A6C34878D82A}">
+                    <a16:rowId xmlns:a16="http://schemas.microsoft.com/office/drawing/2014/main" val="10002"/>
+                  </a:ext>
+                </a:extLst>
               </a:tr>
               <a:tr h="1405890">
                 <a:tc>
                   <a:txBody>
-                    <a:bodyPr wrap="square"/>
+                    <a:bodyPr/>
                     <a:lstStyle/>
                     <a:p>
                       <a:pPr algn="ctr"/>
@@ -5111,7 +5237,7 @@
                 </a:tc>
                 <a:tc>
                   <a:txBody>
-                    <a:bodyPr wrap="square"/>
+                    <a:bodyPr/>
                     <a:lstStyle/>
                     <a:p>
                       <a:pPr algn="l"/>
@@ -5134,7 +5260,7 @@
                 </a:tc>
                 <a:tc>
                   <a:txBody>
-                    <a:bodyPr wrap="square"/>
+                    <a:bodyPr/>
                     <a:lstStyle/>
                     <a:p>
                       <a:pPr algn="l"/>
@@ -5155,6 +5281,11 @@
                     </a:solidFill>
                   </a:tcPr>
                 </a:tc>
+                <a:extLst>
+                  <a:ext uri="{0D108BD9-81ED-4DB2-BD59-A6C34878D82A}">
+                    <a16:rowId xmlns:a16="http://schemas.microsoft.com/office/drawing/2014/main" val="10003"/>
+                  </a:ext>
+                </a:extLst>
               </a:tr>
             </a:tbl>
           </a:graphicData>
@@ -5169,7 +5300,7 @@
 </file>
 
 <file path=ppt/slides/slide14.xml><?xml version="1.0" encoding="utf-8"?>
-<p:sld xmlns:a="http://schemas.openxmlformats.org/drawingml/2006/main" xmlns:p="http://schemas.openxmlformats.org/presentationml/2006/main" xmlns:r="http://schemas.openxmlformats.org/officeDocument/2006/relationships">
+<p:sld xmlns:a="http://schemas.openxmlformats.org/drawingml/2006/main" xmlns:r="http://schemas.openxmlformats.org/officeDocument/2006/relationships" xmlns:p="http://schemas.openxmlformats.org/presentationml/2006/main">
   <p:cSld>
     <p:bg>
       <p:bgPr>
@@ -5185,7 +5316,14 @@
         <p:cNvGrpSpPr/>
         <p:nvPr/>
       </p:nvGrpSpPr>
-      <p:grpSpPr/>
+      <p:grpSpPr>
+        <a:xfrm>
+          <a:off x="0" y="0"/>
+          <a:ext cx="0" cy="0"/>
+          <a:chOff x="0" y="0"/>
+          <a:chExt cx="0" cy="0"/>
+        </a:xfrm>
+      </p:grpSpPr>
       <p:sp>
         <p:nvSpPr>
           <p:cNvPr id="2" name="Rectangle 1"/>
@@ -5226,6 +5364,7 @@
           <a:lstStyle/>
           <a:p>
             <a:pPr algn="ctr"/>
+            <a:endParaRPr/>
           </a:p>
         </p:txBody>
       </p:sp>
@@ -5269,6 +5408,7 @@
           <a:lstStyle/>
           <a:p>
             <a:pPr algn="ctr"/>
+            <a:endParaRPr/>
           </a:p>
         </p:txBody>
       </p:sp>
@@ -5312,6 +5452,7 @@
           <a:lstStyle/>
           <a:p>
             <a:pPr algn="ctr"/>
+            <a:endParaRPr/>
           </a:p>
         </p:txBody>
       </p:sp>
@@ -5429,7 +5570,7 @@
 </file>
 
 <file path=ppt/slides/slide15.xml><?xml version="1.0" encoding="utf-8"?>
-<p:sld xmlns:a="http://schemas.openxmlformats.org/drawingml/2006/main" xmlns:p="http://schemas.openxmlformats.org/presentationml/2006/main" xmlns:r="http://schemas.openxmlformats.org/officeDocument/2006/relationships">
+<p:sld xmlns:a="http://schemas.openxmlformats.org/drawingml/2006/main" xmlns:r="http://schemas.openxmlformats.org/officeDocument/2006/relationships" xmlns:p="http://schemas.openxmlformats.org/presentationml/2006/main">
   <p:cSld>
     <p:bg>
       <p:bgPr>
@@ -5445,7 +5586,14 @@
         <p:cNvGrpSpPr/>
         <p:nvPr/>
       </p:nvGrpSpPr>
-      <p:grpSpPr/>
+      <p:grpSpPr>
+        <a:xfrm>
+          <a:off x="0" y="0"/>
+          <a:ext cx="0" cy="0"/>
+          <a:chOff x="0" y="0"/>
+          <a:chExt cx="0" cy="0"/>
+        </a:xfrm>
+      </p:grpSpPr>
       <p:sp>
         <p:nvSpPr>
           <p:cNvPr id="2" name="Rectangle 1"/>
@@ -5486,6 +5634,7 @@
           <a:lstStyle/>
           <a:p>
             <a:pPr algn="ctr"/>
+            <a:endParaRPr/>
           </a:p>
         </p:txBody>
       </p:sp>
@@ -5529,6 +5678,7 @@
           <a:lstStyle/>
           <a:p>
             <a:pPr algn="ctr"/>
+            <a:endParaRPr/>
           </a:p>
         </p:txBody>
       </p:sp>
@@ -5642,6 +5792,7 @@
           <a:lstStyle/>
           <a:p>
             <a:pPr algn="ctr"/>
+            <a:endParaRPr/>
           </a:p>
         </p:txBody>
       </p:sp>
@@ -5687,6 +5838,7 @@
           <a:lstStyle/>
           <a:p>
             <a:pPr algn="ctr"/>
+            <a:endParaRPr/>
           </a:p>
         </p:txBody>
       </p:sp>
@@ -5730,6 +5882,7 @@
           <a:lstStyle/>
           <a:p>
             <a:pPr algn="ctr"/>
+            <a:endParaRPr/>
           </a:p>
         </p:txBody>
       </p:sp>
@@ -5775,6 +5928,7 @@
           <a:lstStyle/>
           <a:p>
             <a:pPr algn="ctr"/>
+            <a:endParaRPr/>
           </a:p>
         </p:txBody>
       </p:sp>
@@ -5818,6 +5972,7 @@
           <a:lstStyle/>
           <a:p>
             <a:pPr algn="ctr"/>
+            <a:endParaRPr/>
           </a:p>
         </p:txBody>
       </p:sp>
@@ -5863,6 +6018,7 @@
           <a:lstStyle/>
           <a:p>
             <a:pPr algn="ctr"/>
+            <a:endParaRPr/>
           </a:p>
         </p:txBody>
       </p:sp>
@@ -5908,6 +6064,7 @@
           <a:lstStyle/>
           <a:p>
             <a:pPr algn="ctr"/>
+            <a:endParaRPr/>
           </a:p>
         </p:txBody>
       </p:sp>
@@ -5953,6 +6110,7 @@
           <a:lstStyle/>
           <a:p>
             <a:pPr algn="ctr"/>
+            <a:endParaRPr/>
           </a:p>
         </p:txBody>
       </p:sp>
@@ -5998,6 +6156,7 @@
           <a:lstStyle/>
           <a:p>
             <a:pPr algn="ctr"/>
+            <a:endParaRPr/>
           </a:p>
         </p:txBody>
       </p:sp>
@@ -6043,6 +6202,7 @@
           <a:lstStyle/>
           <a:p>
             <a:pPr algn="ctr"/>
+            <a:endParaRPr/>
           </a:p>
         </p:txBody>
       </p:sp>
@@ -6123,6 +6283,7 @@
           <a:lstStyle/>
           <a:p>
             <a:pPr algn="ctr"/>
+            <a:endParaRPr/>
           </a:p>
         </p:txBody>
       </p:sp>
@@ -6203,6 +6364,7 @@
           <a:lstStyle/>
           <a:p>
             <a:pPr algn="ctr"/>
+            <a:endParaRPr/>
           </a:p>
         </p:txBody>
       </p:sp>
@@ -6283,6 +6445,7 @@
           <a:lstStyle/>
           <a:p>
             <a:pPr algn="ctr"/>
+            <a:endParaRPr/>
           </a:p>
         </p:txBody>
       </p:sp>
@@ -6363,6 +6526,7 @@
           <a:lstStyle/>
           <a:p>
             <a:pPr algn="ctr"/>
+            <a:endParaRPr/>
           </a:p>
         </p:txBody>
       </p:sp>
@@ -6443,6 +6607,7 @@
           <a:lstStyle/>
           <a:p>
             <a:pPr algn="ctr"/>
+            <a:endParaRPr/>
           </a:p>
         </p:txBody>
       </p:sp>
@@ -6523,6 +6688,7 @@
           <a:lstStyle/>
           <a:p>
             <a:pPr algn="ctr"/>
+            <a:endParaRPr/>
           </a:p>
         </p:txBody>
       </p:sp>
@@ -6603,6 +6769,7 @@
           <a:lstStyle/>
           <a:p>
             <a:pPr algn="ctr"/>
+            <a:endParaRPr/>
           </a:p>
         </p:txBody>
       </p:sp>
@@ -6683,6 +6850,7 @@
           <a:lstStyle/>
           <a:p>
             <a:pPr algn="ctr"/>
+            <a:endParaRPr/>
           </a:p>
         </p:txBody>
       </p:sp>
@@ -6763,6 +6931,7 @@
           <a:lstStyle/>
           <a:p>
             <a:pPr algn="ctr"/>
+            <a:endParaRPr/>
           </a:p>
         </p:txBody>
       </p:sp>
@@ -6843,6 +7012,7 @@
           <a:lstStyle/>
           <a:p>
             <a:pPr algn="ctr"/>
+            <a:endParaRPr/>
           </a:p>
         </p:txBody>
       </p:sp>
@@ -6956,6 +7126,7 @@
           <a:lstStyle/>
           <a:p>
             <a:pPr algn="ctr"/>
+            <a:endParaRPr/>
           </a:p>
         </p:txBody>
       </p:sp>
@@ -7034,6 +7205,7 @@
           <a:lstStyle/>
           <a:p>
             <a:pPr algn="ctr"/>
+            <a:endParaRPr/>
           </a:p>
         </p:txBody>
       </p:sp>
@@ -7112,6 +7284,7 @@
           <a:lstStyle/>
           <a:p>
             <a:pPr algn="ctr"/>
+            <a:endParaRPr/>
           </a:p>
         </p:txBody>
       </p:sp>
@@ -7190,6 +7363,7 @@
           <a:lstStyle/>
           <a:p>
             <a:pPr algn="ctr"/>
+            <a:endParaRPr/>
           </a:p>
         </p:txBody>
       </p:sp>
@@ -7268,6 +7442,7 @@
           <a:lstStyle/>
           <a:p>
             <a:pPr algn="ctr"/>
+            <a:endParaRPr/>
           </a:p>
         </p:txBody>
       </p:sp>
@@ -7346,6 +7521,7 @@
           <a:lstStyle/>
           <a:p>
             <a:pPr algn="ctr"/>
+            <a:endParaRPr/>
           </a:p>
         </p:txBody>
       </p:sp>
@@ -7389,6 +7565,7 @@
           <a:lstStyle/>
           <a:p>
             <a:pPr algn="ctr"/>
+            <a:endParaRPr/>
           </a:p>
         </p:txBody>
       </p:sp>
@@ -7677,6 +7854,7 @@
           <a:lstStyle/>
           <a:p>
             <a:pPr algn="ctr"/>
+            <a:endParaRPr/>
           </a:p>
         </p:txBody>
       </p:sp>
@@ -7720,6 +7898,7 @@
           <a:lstStyle/>
           <a:p>
             <a:pPr algn="ctr"/>
+            <a:endParaRPr/>
           </a:p>
         </p:txBody>
       </p:sp>
@@ -8008,6 +8187,7 @@
           <a:lstStyle/>
           <a:p>
             <a:pPr algn="ctr"/>
+            <a:endParaRPr/>
           </a:p>
         </p:txBody>
       </p:sp>
@@ -8051,6 +8231,7 @@
           <a:lstStyle/>
           <a:p>
             <a:pPr algn="ctr"/>
+            <a:endParaRPr/>
           </a:p>
         </p:txBody>
       </p:sp>
@@ -8374,6 +8555,7 @@
           <a:lstStyle/>
           <a:p>
             <a:pPr algn="ctr"/>
+            <a:endParaRPr/>
           </a:p>
         </p:txBody>
       </p:sp>
@@ -8557,6 +8739,7 @@
           <a:lstStyle/>
           <a:p>
             <a:pPr algn="ctr"/>
+            <a:endParaRPr/>
           </a:p>
         </p:txBody>
       </p:sp>
@@ -8740,6 +8923,7 @@
           <a:lstStyle/>
           <a:p>
             <a:pPr algn="ctr"/>
+            <a:endParaRPr/>
           </a:p>
         </p:txBody>
       </p:sp>
@@ -8857,7 +9041,7 @@
 </file>
 
 <file path=ppt/slides/slide16.xml><?xml version="1.0" encoding="utf-8"?>
-<p:sld xmlns:a="http://schemas.openxmlformats.org/drawingml/2006/main" xmlns:p="http://schemas.openxmlformats.org/presentationml/2006/main" xmlns:r="http://schemas.openxmlformats.org/officeDocument/2006/relationships">
+<p:sld xmlns:a="http://schemas.openxmlformats.org/drawingml/2006/main" xmlns:r="http://schemas.openxmlformats.org/officeDocument/2006/relationships" xmlns:p="http://schemas.openxmlformats.org/presentationml/2006/main">
   <p:cSld>
     <p:bg>
       <p:bgPr>
@@ -8873,7 +9057,14 @@
         <p:cNvGrpSpPr/>
         <p:nvPr/>
       </p:nvGrpSpPr>
-      <p:grpSpPr/>
+      <p:grpSpPr>
+        <a:xfrm>
+          <a:off x="0" y="0"/>
+          <a:ext cx="0" cy="0"/>
+          <a:chOff x="0" y="0"/>
+          <a:chExt cx="0" cy="0"/>
+        </a:xfrm>
+      </p:grpSpPr>
       <p:sp>
         <p:nvSpPr>
           <p:cNvPr id="2" name="Rectangle 1"/>
@@ -8914,6 +9105,7 @@
           <a:lstStyle/>
           <a:p>
             <a:pPr algn="ctr"/>
+            <a:endParaRPr/>
           </a:p>
         </p:txBody>
       </p:sp>
@@ -8957,6 +9149,7 @@
           <a:lstStyle/>
           <a:p>
             <a:pPr algn="ctr"/>
+            <a:endParaRPr/>
           </a:p>
         </p:txBody>
       </p:sp>
@@ -9070,6 +9263,7 @@
           <a:lstStyle/>
           <a:p>
             <a:pPr algn="ctr"/>
+            <a:endParaRPr/>
           </a:p>
         </p:txBody>
       </p:sp>
@@ -9115,6 +9309,7 @@
           <a:lstStyle/>
           <a:p>
             <a:pPr algn="ctr"/>
+            <a:endParaRPr/>
           </a:p>
         </p:txBody>
       </p:sp>
@@ -9158,6 +9353,7 @@
           <a:lstStyle/>
           <a:p>
             <a:pPr algn="ctr"/>
+            <a:endParaRPr/>
           </a:p>
         </p:txBody>
       </p:sp>
@@ -9203,6 +9399,7 @@
           <a:lstStyle/>
           <a:p>
             <a:pPr algn="ctr"/>
+            <a:endParaRPr/>
           </a:p>
         </p:txBody>
       </p:sp>
@@ -9246,6 +9443,7 @@
           <a:lstStyle/>
           <a:p>
             <a:pPr algn="ctr"/>
+            <a:endParaRPr/>
           </a:p>
         </p:txBody>
       </p:sp>
@@ -9291,6 +9489,7 @@
           <a:lstStyle/>
           <a:p>
             <a:pPr algn="ctr"/>
+            <a:endParaRPr/>
           </a:p>
         </p:txBody>
       </p:sp>
@@ -9336,6 +9535,7 @@
           <a:lstStyle/>
           <a:p>
             <a:pPr algn="ctr"/>
+            <a:endParaRPr/>
           </a:p>
         </p:txBody>
       </p:sp>
@@ -9381,6 +9581,7 @@
           <a:lstStyle/>
           <a:p>
             <a:pPr algn="ctr"/>
+            <a:endParaRPr/>
           </a:p>
         </p:txBody>
       </p:sp>
@@ -9426,6 +9627,7 @@
           <a:lstStyle/>
           <a:p>
             <a:pPr algn="ctr"/>
+            <a:endParaRPr/>
           </a:p>
         </p:txBody>
       </p:sp>
@@ -9471,6 +9673,7 @@
           <a:lstStyle/>
           <a:p>
             <a:pPr algn="ctr"/>
+            <a:endParaRPr/>
           </a:p>
         </p:txBody>
       </p:sp>
@@ -9551,6 +9754,7 @@
           <a:lstStyle/>
           <a:p>
             <a:pPr algn="ctr"/>
+            <a:endParaRPr/>
           </a:p>
         </p:txBody>
       </p:sp>
@@ -9631,6 +9835,7 @@
           <a:lstStyle/>
           <a:p>
             <a:pPr algn="ctr"/>
+            <a:endParaRPr/>
           </a:p>
         </p:txBody>
       </p:sp>
@@ -9711,6 +9916,7 @@
           <a:lstStyle/>
           <a:p>
             <a:pPr algn="ctr"/>
+            <a:endParaRPr/>
           </a:p>
         </p:txBody>
       </p:sp>
@@ -9791,6 +9997,7 @@
           <a:lstStyle/>
           <a:p>
             <a:pPr algn="ctr"/>
+            <a:endParaRPr/>
           </a:p>
         </p:txBody>
       </p:sp>
@@ -9871,6 +10078,7 @@
           <a:lstStyle/>
           <a:p>
             <a:pPr algn="ctr"/>
+            <a:endParaRPr/>
           </a:p>
         </p:txBody>
       </p:sp>
@@ -9951,6 +10159,7 @@
           <a:lstStyle/>
           <a:p>
             <a:pPr algn="ctr"/>
+            <a:endParaRPr/>
           </a:p>
         </p:txBody>
       </p:sp>
@@ -10031,6 +10240,7 @@
           <a:lstStyle/>
           <a:p>
             <a:pPr algn="ctr"/>
+            <a:endParaRPr/>
           </a:p>
         </p:txBody>
       </p:sp>
@@ -10111,6 +10321,7 @@
           <a:lstStyle/>
           <a:p>
             <a:pPr algn="ctr"/>
+            <a:endParaRPr/>
           </a:p>
         </p:txBody>
       </p:sp>
@@ -10191,6 +10402,7 @@
           <a:lstStyle/>
           <a:p>
             <a:pPr algn="ctr"/>
+            <a:endParaRPr/>
           </a:p>
         </p:txBody>
       </p:sp>
@@ -10271,6 +10483,7 @@
           <a:lstStyle/>
           <a:p>
             <a:pPr algn="ctr"/>
+            <a:endParaRPr/>
           </a:p>
         </p:txBody>
       </p:sp>
@@ -10384,6 +10597,7 @@
           <a:lstStyle/>
           <a:p>
             <a:pPr algn="ctr"/>
+            <a:endParaRPr/>
           </a:p>
         </p:txBody>
       </p:sp>
@@ -10462,6 +10676,7 @@
           <a:lstStyle/>
           <a:p>
             <a:pPr algn="ctr"/>
+            <a:endParaRPr/>
           </a:p>
         </p:txBody>
       </p:sp>
@@ -10540,6 +10755,7 @@
           <a:lstStyle/>
           <a:p>
             <a:pPr algn="ctr"/>
+            <a:endParaRPr/>
           </a:p>
         </p:txBody>
       </p:sp>
@@ -10618,6 +10834,7 @@
           <a:lstStyle/>
           <a:p>
             <a:pPr algn="ctr"/>
+            <a:endParaRPr/>
           </a:p>
         </p:txBody>
       </p:sp>
@@ -10696,6 +10913,7 @@
           <a:lstStyle/>
           <a:p>
             <a:pPr algn="ctr"/>
+            <a:endParaRPr/>
           </a:p>
         </p:txBody>
       </p:sp>
@@ -10774,6 +10992,7 @@
           <a:lstStyle/>
           <a:p>
             <a:pPr algn="ctr"/>
+            <a:endParaRPr/>
           </a:p>
         </p:txBody>
       </p:sp>
@@ -10817,6 +11036,7 @@
           <a:lstStyle/>
           <a:p>
             <a:pPr algn="ctr"/>
+            <a:endParaRPr/>
           </a:p>
         </p:txBody>
       </p:sp>
@@ -11105,6 +11325,7 @@
           <a:lstStyle/>
           <a:p>
             <a:pPr algn="ctr"/>
+            <a:endParaRPr/>
           </a:p>
         </p:txBody>
       </p:sp>
@@ -11148,6 +11369,7 @@
           <a:lstStyle/>
           <a:p>
             <a:pPr algn="ctr"/>
+            <a:endParaRPr/>
           </a:p>
         </p:txBody>
       </p:sp>
@@ -11436,6 +11658,7 @@
           <a:lstStyle/>
           <a:p>
             <a:pPr algn="ctr"/>
+            <a:endParaRPr/>
           </a:p>
         </p:txBody>
       </p:sp>
@@ -11479,6 +11702,7 @@
           <a:lstStyle/>
           <a:p>
             <a:pPr algn="ctr"/>
+            <a:endParaRPr/>
           </a:p>
         </p:txBody>
       </p:sp>
@@ -11802,6 +12026,7 @@
           <a:lstStyle/>
           <a:p>
             <a:pPr algn="ctr"/>
+            <a:endParaRPr/>
           </a:p>
         </p:txBody>
       </p:sp>
@@ -11985,6 +12210,7 @@
           <a:lstStyle/>
           <a:p>
             <a:pPr algn="ctr"/>
+            <a:endParaRPr/>
           </a:p>
         </p:txBody>
       </p:sp>
@@ -12168,6 +12394,7 @@
           <a:lstStyle/>
           <a:p>
             <a:pPr algn="ctr"/>
+            <a:endParaRPr/>
           </a:p>
         </p:txBody>
       </p:sp>
@@ -12320,7 +12547,7 @@
 </file>
 
 <file path=ppt/slides/slide17.xml><?xml version="1.0" encoding="utf-8"?>
-<p:sld xmlns:a="http://schemas.openxmlformats.org/drawingml/2006/main" xmlns:p="http://schemas.openxmlformats.org/presentationml/2006/main" xmlns:r="http://schemas.openxmlformats.org/officeDocument/2006/relationships">
+<p:sld xmlns:a="http://schemas.openxmlformats.org/drawingml/2006/main" xmlns:r="http://schemas.openxmlformats.org/officeDocument/2006/relationships" xmlns:p="http://schemas.openxmlformats.org/presentationml/2006/main">
   <p:cSld>
     <p:bg>
       <p:bgPr>
@@ -12336,7 +12563,14 @@
         <p:cNvGrpSpPr/>
         <p:nvPr/>
       </p:nvGrpSpPr>
-      <p:grpSpPr/>
+      <p:grpSpPr>
+        <a:xfrm>
+          <a:off x="0" y="0"/>
+          <a:ext cx="0" cy="0"/>
+          <a:chOff x="0" y="0"/>
+          <a:chExt cx="0" cy="0"/>
+        </a:xfrm>
+      </p:grpSpPr>
       <p:sp>
         <p:nvSpPr>
           <p:cNvPr id="2" name="Rectangle 1"/>
@@ -12377,6 +12611,7 @@
           <a:lstStyle/>
           <a:p>
             <a:pPr algn="ctr"/>
+            <a:endParaRPr/>
           </a:p>
         </p:txBody>
       </p:sp>
@@ -12420,6 +12655,7 @@
           <a:lstStyle/>
           <a:p>
             <a:pPr algn="ctr"/>
+            <a:endParaRPr/>
           </a:p>
         </p:txBody>
       </p:sp>
@@ -12533,6 +12769,7 @@
           <a:lstStyle/>
           <a:p>
             <a:pPr algn="ctr"/>
+            <a:endParaRPr/>
           </a:p>
         </p:txBody>
       </p:sp>
@@ -12578,6 +12815,7 @@
           <a:lstStyle/>
           <a:p>
             <a:pPr algn="ctr"/>
+            <a:endParaRPr/>
           </a:p>
         </p:txBody>
       </p:sp>
@@ -12621,6 +12859,7 @@
           <a:lstStyle/>
           <a:p>
             <a:pPr algn="ctr"/>
+            <a:endParaRPr/>
           </a:p>
         </p:txBody>
       </p:sp>
@@ -12666,6 +12905,7 @@
           <a:lstStyle/>
           <a:p>
             <a:pPr algn="ctr"/>
+            <a:endParaRPr/>
           </a:p>
         </p:txBody>
       </p:sp>
@@ -12709,6 +12949,7 @@
           <a:lstStyle/>
           <a:p>
             <a:pPr algn="ctr"/>
+            <a:endParaRPr/>
           </a:p>
         </p:txBody>
       </p:sp>
@@ -12754,6 +12995,7 @@
           <a:lstStyle/>
           <a:p>
             <a:pPr algn="ctr"/>
+            <a:endParaRPr/>
           </a:p>
         </p:txBody>
       </p:sp>
@@ -12799,6 +13041,7 @@
           <a:lstStyle/>
           <a:p>
             <a:pPr algn="ctr"/>
+            <a:endParaRPr/>
           </a:p>
         </p:txBody>
       </p:sp>
@@ -12844,6 +13087,7 @@
           <a:lstStyle/>
           <a:p>
             <a:pPr algn="ctr"/>
+            <a:endParaRPr/>
           </a:p>
         </p:txBody>
       </p:sp>
@@ -12889,6 +13133,7 @@
           <a:lstStyle/>
           <a:p>
             <a:pPr algn="ctr"/>
+            <a:endParaRPr/>
           </a:p>
         </p:txBody>
       </p:sp>
@@ -12934,6 +13179,7 @@
           <a:lstStyle/>
           <a:p>
             <a:pPr algn="ctr"/>
+            <a:endParaRPr/>
           </a:p>
         </p:txBody>
       </p:sp>
@@ -13014,6 +13260,7 @@
           <a:lstStyle/>
           <a:p>
             <a:pPr algn="ctr"/>
+            <a:endParaRPr/>
           </a:p>
         </p:txBody>
       </p:sp>
@@ -13094,6 +13341,7 @@
           <a:lstStyle/>
           <a:p>
             <a:pPr algn="ctr"/>
+            <a:endParaRPr/>
           </a:p>
         </p:txBody>
       </p:sp>
@@ -13174,6 +13422,7 @@
           <a:lstStyle/>
           <a:p>
             <a:pPr algn="ctr"/>
+            <a:endParaRPr/>
           </a:p>
         </p:txBody>
       </p:sp>
@@ -13254,6 +13503,7 @@
           <a:lstStyle/>
           <a:p>
             <a:pPr algn="ctr"/>
+            <a:endParaRPr/>
           </a:p>
         </p:txBody>
       </p:sp>
@@ -13334,6 +13584,7 @@
           <a:lstStyle/>
           <a:p>
             <a:pPr algn="ctr"/>
+            <a:endParaRPr/>
           </a:p>
         </p:txBody>
       </p:sp>
@@ -13414,6 +13665,7 @@
           <a:lstStyle/>
           <a:p>
             <a:pPr algn="ctr"/>
+            <a:endParaRPr/>
           </a:p>
         </p:txBody>
       </p:sp>
@@ -13494,6 +13746,7 @@
           <a:lstStyle/>
           <a:p>
             <a:pPr algn="ctr"/>
+            <a:endParaRPr/>
           </a:p>
         </p:txBody>
       </p:sp>
@@ -13574,6 +13827,7 @@
           <a:lstStyle/>
           <a:p>
             <a:pPr algn="ctr"/>
+            <a:endParaRPr/>
           </a:p>
         </p:txBody>
       </p:sp>
@@ -13654,6 +13908,7 @@
           <a:lstStyle/>
           <a:p>
             <a:pPr algn="ctr"/>
+            <a:endParaRPr/>
           </a:p>
         </p:txBody>
       </p:sp>
@@ -13734,6 +13989,7 @@
           <a:lstStyle/>
           <a:p>
             <a:pPr algn="ctr"/>
+            <a:endParaRPr/>
           </a:p>
         </p:txBody>
       </p:sp>
@@ -13847,6 +14103,7 @@
           <a:lstStyle/>
           <a:p>
             <a:pPr algn="ctr"/>
+            <a:endParaRPr/>
           </a:p>
         </p:txBody>
       </p:sp>
@@ -13925,6 +14182,7 @@
           <a:lstStyle/>
           <a:p>
             <a:pPr algn="ctr"/>
+            <a:endParaRPr/>
           </a:p>
         </p:txBody>
       </p:sp>
@@ -14003,6 +14261,7 @@
           <a:lstStyle/>
           <a:p>
             <a:pPr algn="ctr"/>
+            <a:endParaRPr/>
           </a:p>
         </p:txBody>
       </p:sp>
@@ -14081,6 +14340,7 @@
           <a:lstStyle/>
           <a:p>
             <a:pPr algn="ctr"/>
+            <a:endParaRPr/>
           </a:p>
         </p:txBody>
       </p:sp>
@@ -14159,6 +14419,7 @@
           <a:lstStyle/>
           <a:p>
             <a:pPr algn="ctr"/>
+            <a:endParaRPr/>
           </a:p>
         </p:txBody>
       </p:sp>
@@ -14237,6 +14498,7 @@
           <a:lstStyle/>
           <a:p>
             <a:pPr algn="ctr"/>
+            <a:endParaRPr/>
           </a:p>
         </p:txBody>
       </p:sp>
@@ -14280,6 +14542,7 @@
           <a:lstStyle/>
           <a:p>
             <a:pPr algn="ctr"/>
+            <a:endParaRPr/>
           </a:p>
         </p:txBody>
       </p:sp>
@@ -14568,6 +14831,7 @@
           <a:lstStyle/>
           <a:p>
             <a:pPr algn="ctr"/>
+            <a:endParaRPr/>
           </a:p>
         </p:txBody>
       </p:sp>
@@ -14611,6 +14875,7 @@
           <a:lstStyle/>
           <a:p>
             <a:pPr algn="ctr"/>
+            <a:endParaRPr/>
           </a:p>
         </p:txBody>
       </p:sp>
@@ -14899,6 +15164,7 @@
           <a:lstStyle/>
           <a:p>
             <a:pPr algn="ctr"/>
+            <a:endParaRPr/>
           </a:p>
         </p:txBody>
       </p:sp>
@@ -14942,6 +15208,7 @@
           <a:lstStyle/>
           <a:p>
             <a:pPr algn="ctr"/>
+            <a:endParaRPr/>
           </a:p>
         </p:txBody>
       </p:sp>
@@ -15265,6 +15532,7 @@
           <a:lstStyle/>
           <a:p>
             <a:pPr algn="ctr"/>
+            <a:endParaRPr/>
           </a:p>
         </p:txBody>
       </p:sp>
@@ -15448,6 +15716,7 @@
           <a:lstStyle/>
           <a:p>
             <a:pPr algn="ctr"/>
+            <a:endParaRPr/>
           </a:p>
         </p:txBody>
       </p:sp>
@@ -15631,6 +15900,7 @@
           <a:lstStyle/>
           <a:p>
             <a:pPr algn="ctr"/>
+            <a:endParaRPr/>
           </a:p>
         </p:txBody>
       </p:sp>
@@ -15783,7 +16053,7 @@
 </file>
 
 <file path=ppt/slides/slide18.xml><?xml version="1.0" encoding="utf-8"?>
-<p:sld xmlns:a="http://schemas.openxmlformats.org/drawingml/2006/main" xmlns:p="http://schemas.openxmlformats.org/presentationml/2006/main" xmlns:r="http://schemas.openxmlformats.org/officeDocument/2006/relationships">
+<p:sld xmlns:a="http://schemas.openxmlformats.org/drawingml/2006/main" xmlns:r="http://schemas.openxmlformats.org/officeDocument/2006/relationships" xmlns:p="http://schemas.openxmlformats.org/presentationml/2006/main">
   <p:cSld>
     <p:bg>
       <p:bgPr>
@@ -15799,7 +16069,14 @@
         <p:cNvGrpSpPr/>
         <p:nvPr/>
       </p:nvGrpSpPr>
-      <p:grpSpPr/>
+      <p:grpSpPr>
+        <a:xfrm>
+          <a:off x="0" y="0"/>
+          <a:ext cx="0" cy="0"/>
+          <a:chOff x="0" y="0"/>
+          <a:chExt cx="0" cy="0"/>
+        </a:xfrm>
+      </p:grpSpPr>
       <p:sp>
         <p:nvSpPr>
           <p:cNvPr id="2" name="Rectangle 1"/>
@@ -15840,6 +16117,7 @@
           <a:lstStyle/>
           <a:p>
             <a:pPr algn="ctr"/>
+            <a:endParaRPr/>
           </a:p>
         </p:txBody>
       </p:sp>
@@ -15883,6 +16161,7 @@
           <a:lstStyle/>
           <a:p>
             <a:pPr algn="ctr"/>
+            <a:endParaRPr/>
           </a:p>
         </p:txBody>
       </p:sp>
@@ -15996,6 +16275,7 @@
           <a:lstStyle/>
           <a:p>
             <a:pPr algn="ctr"/>
+            <a:endParaRPr/>
           </a:p>
         </p:txBody>
       </p:sp>
@@ -16041,6 +16321,7 @@
           <a:lstStyle/>
           <a:p>
             <a:pPr algn="ctr"/>
+            <a:endParaRPr/>
           </a:p>
         </p:txBody>
       </p:sp>
@@ -16084,6 +16365,7 @@
           <a:lstStyle/>
           <a:p>
             <a:pPr algn="ctr"/>
+            <a:endParaRPr/>
           </a:p>
         </p:txBody>
       </p:sp>
@@ -16129,6 +16411,7 @@
           <a:lstStyle/>
           <a:p>
             <a:pPr algn="ctr"/>
+            <a:endParaRPr/>
           </a:p>
         </p:txBody>
       </p:sp>
@@ -16172,6 +16455,7 @@
           <a:lstStyle/>
           <a:p>
             <a:pPr algn="ctr"/>
+            <a:endParaRPr/>
           </a:p>
         </p:txBody>
       </p:sp>
@@ -16217,6 +16501,7 @@
           <a:lstStyle/>
           <a:p>
             <a:pPr algn="ctr"/>
+            <a:endParaRPr/>
           </a:p>
         </p:txBody>
       </p:sp>
@@ -16262,6 +16547,7 @@
           <a:lstStyle/>
           <a:p>
             <a:pPr algn="ctr"/>
+            <a:endParaRPr/>
           </a:p>
         </p:txBody>
       </p:sp>
@@ -16307,6 +16593,7 @@
           <a:lstStyle/>
           <a:p>
             <a:pPr algn="ctr"/>
+            <a:endParaRPr/>
           </a:p>
         </p:txBody>
       </p:sp>
@@ -16352,6 +16639,7 @@
           <a:lstStyle/>
           <a:p>
             <a:pPr algn="ctr"/>
+            <a:endParaRPr/>
           </a:p>
         </p:txBody>
       </p:sp>
@@ -16397,6 +16685,7 @@
           <a:lstStyle/>
           <a:p>
             <a:pPr algn="ctr"/>
+            <a:endParaRPr/>
           </a:p>
         </p:txBody>
       </p:sp>
@@ -16477,6 +16766,7 @@
           <a:lstStyle/>
           <a:p>
             <a:pPr algn="ctr"/>
+            <a:endParaRPr/>
           </a:p>
         </p:txBody>
       </p:sp>
@@ -16557,6 +16847,7 @@
           <a:lstStyle/>
           <a:p>
             <a:pPr algn="ctr"/>
+            <a:endParaRPr/>
           </a:p>
         </p:txBody>
       </p:sp>
@@ -16637,6 +16928,7 @@
           <a:lstStyle/>
           <a:p>
             <a:pPr algn="ctr"/>
+            <a:endParaRPr/>
           </a:p>
         </p:txBody>
       </p:sp>
@@ -16717,6 +17009,7 @@
           <a:lstStyle/>
           <a:p>
             <a:pPr algn="ctr"/>
+            <a:endParaRPr/>
           </a:p>
         </p:txBody>
       </p:sp>
@@ -16797,6 +17090,7 @@
           <a:lstStyle/>
           <a:p>
             <a:pPr algn="ctr"/>
+            <a:endParaRPr/>
           </a:p>
         </p:txBody>
       </p:sp>
@@ -16877,6 +17171,7 @@
           <a:lstStyle/>
           <a:p>
             <a:pPr algn="ctr"/>
+            <a:endParaRPr/>
           </a:p>
         </p:txBody>
       </p:sp>
@@ -16957,6 +17252,7 @@
           <a:lstStyle/>
           <a:p>
             <a:pPr algn="ctr"/>
+            <a:endParaRPr/>
           </a:p>
         </p:txBody>
       </p:sp>
@@ -17037,6 +17333,7 @@
           <a:lstStyle/>
           <a:p>
             <a:pPr algn="ctr"/>
+            <a:endParaRPr/>
           </a:p>
         </p:txBody>
       </p:sp>
@@ -17117,6 +17414,7 @@
           <a:lstStyle/>
           <a:p>
             <a:pPr algn="ctr"/>
+            <a:endParaRPr/>
           </a:p>
         </p:txBody>
       </p:sp>
@@ -17197,6 +17495,7 @@
           <a:lstStyle/>
           <a:p>
             <a:pPr algn="ctr"/>
+            <a:endParaRPr/>
           </a:p>
         </p:txBody>
       </p:sp>
@@ -17310,6 +17609,7 @@
           <a:lstStyle/>
           <a:p>
             <a:pPr algn="ctr"/>
+            <a:endParaRPr/>
           </a:p>
         </p:txBody>
       </p:sp>
@@ -17388,6 +17688,7 @@
           <a:lstStyle/>
           <a:p>
             <a:pPr algn="ctr"/>
+            <a:endParaRPr/>
           </a:p>
         </p:txBody>
       </p:sp>
@@ -17466,6 +17767,7 @@
           <a:lstStyle/>
           <a:p>
             <a:pPr algn="ctr"/>
+            <a:endParaRPr/>
           </a:p>
         </p:txBody>
       </p:sp>
@@ -17544,6 +17846,7 @@
           <a:lstStyle/>
           <a:p>
             <a:pPr algn="ctr"/>
+            <a:endParaRPr/>
           </a:p>
         </p:txBody>
       </p:sp>
@@ -17622,6 +17925,7 @@
           <a:lstStyle/>
           <a:p>
             <a:pPr algn="ctr"/>
+            <a:endParaRPr/>
           </a:p>
         </p:txBody>
       </p:sp>
@@ -17700,6 +18004,7 @@
           <a:lstStyle/>
           <a:p>
             <a:pPr algn="ctr"/>
+            <a:endParaRPr/>
           </a:p>
         </p:txBody>
       </p:sp>
@@ -17743,6 +18048,7 @@
           <a:lstStyle/>
           <a:p>
             <a:pPr algn="ctr"/>
+            <a:endParaRPr/>
           </a:p>
         </p:txBody>
       </p:sp>
@@ -18031,6 +18337,7 @@
           <a:lstStyle/>
           <a:p>
             <a:pPr algn="ctr"/>
+            <a:endParaRPr/>
           </a:p>
         </p:txBody>
       </p:sp>
@@ -18074,6 +18381,7 @@
           <a:lstStyle/>
           <a:p>
             <a:pPr algn="ctr"/>
+            <a:endParaRPr/>
           </a:p>
         </p:txBody>
       </p:sp>
@@ -18362,6 +18670,7 @@
           <a:lstStyle/>
           <a:p>
             <a:pPr algn="ctr"/>
+            <a:endParaRPr/>
           </a:p>
         </p:txBody>
       </p:sp>
@@ -18405,6 +18714,7 @@
           <a:lstStyle/>
           <a:p>
             <a:pPr algn="ctr"/>
+            <a:endParaRPr/>
           </a:p>
         </p:txBody>
       </p:sp>
@@ -18728,6 +19038,7 @@
           <a:lstStyle/>
           <a:p>
             <a:pPr algn="ctr"/>
+            <a:endParaRPr/>
           </a:p>
         </p:txBody>
       </p:sp>
@@ -18911,6 +19222,7 @@
           <a:lstStyle/>
           <a:p>
             <a:pPr algn="ctr"/>
+            <a:endParaRPr/>
           </a:p>
         </p:txBody>
       </p:sp>
@@ -19094,6 +19406,7 @@
           <a:lstStyle/>
           <a:p>
             <a:pPr algn="ctr"/>
+            <a:endParaRPr/>
           </a:p>
         </p:txBody>
       </p:sp>
@@ -19246,7 +19559,7 @@
 </file>
 
 <file path=ppt/slides/slide19.xml><?xml version="1.0" encoding="utf-8"?>
-<p:sld xmlns:a="http://schemas.openxmlformats.org/drawingml/2006/main" xmlns:p="http://schemas.openxmlformats.org/presentationml/2006/main" xmlns:r="http://schemas.openxmlformats.org/officeDocument/2006/relationships">
+<p:sld xmlns:a="http://schemas.openxmlformats.org/drawingml/2006/main" xmlns:r="http://schemas.openxmlformats.org/officeDocument/2006/relationships" xmlns:p="http://schemas.openxmlformats.org/presentationml/2006/main">
   <p:cSld>
     <p:bg>
       <p:bgPr>
@@ -19262,7 +19575,14 @@
         <p:cNvGrpSpPr/>
         <p:nvPr/>
       </p:nvGrpSpPr>
-      <p:grpSpPr/>
+      <p:grpSpPr>
+        <a:xfrm>
+          <a:off x="0" y="0"/>
+          <a:ext cx="0" cy="0"/>
+          <a:chOff x="0" y="0"/>
+          <a:chExt cx="0" cy="0"/>
+        </a:xfrm>
+      </p:grpSpPr>
       <p:sp>
         <p:nvSpPr>
           <p:cNvPr id="2" name="Rectangle 1"/>
@@ -19303,6 +19623,7 @@
           <a:lstStyle/>
           <a:p>
             <a:pPr algn="ctr"/>
+            <a:endParaRPr/>
           </a:p>
         </p:txBody>
       </p:sp>
@@ -19346,6 +19667,7 @@
           <a:lstStyle/>
           <a:p>
             <a:pPr algn="ctr"/>
+            <a:endParaRPr/>
           </a:p>
         </p:txBody>
       </p:sp>
@@ -19459,6 +19781,7 @@
           <a:lstStyle/>
           <a:p>
             <a:pPr algn="ctr"/>
+            <a:endParaRPr/>
           </a:p>
         </p:txBody>
       </p:sp>
@@ -19504,6 +19827,7 @@
           <a:lstStyle/>
           <a:p>
             <a:pPr algn="ctr"/>
+            <a:endParaRPr/>
           </a:p>
         </p:txBody>
       </p:sp>
@@ -19547,6 +19871,7 @@
           <a:lstStyle/>
           <a:p>
             <a:pPr algn="ctr"/>
+            <a:endParaRPr/>
           </a:p>
         </p:txBody>
       </p:sp>
@@ -19592,6 +19917,7 @@
           <a:lstStyle/>
           <a:p>
             <a:pPr algn="ctr"/>
+            <a:endParaRPr/>
           </a:p>
         </p:txBody>
       </p:sp>
@@ -19635,6 +19961,7 @@
           <a:lstStyle/>
           <a:p>
             <a:pPr algn="ctr"/>
+            <a:endParaRPr/>
           </a:p>
         </p:txBody>
       </p:sp>
@@ -19680,6 +20007,7 @@
           <a:lstStyle/>
           <a:p>
             <a:pPr algn="ctr"/>
+            <a:endParaRPr/>
           </a:p>
         </p:txBody>
       </p:sp>
@@ -19725,6 +20053,7 @@
           <a:lstStyle/>
           <a:p>
             <a:pPr algn="ctr"/>
+            <a:endParaRPr/>
           </a:p>
         </p:txBody>
       </p:sp>
@@ -19770,6 +20099,7 @@
           <a:lstStyle/>
           <a:p>
             <a:pPr algn="ctr"/>
+            <a:endParaRPr/>
           </a:p>
         </p:txBody>
       </p:sp>
@@ -19815,6 +20145,7 @@
           <a:lstStyle/>
           <a:p>
             <a:pPr algn="ctr"/>
+            <a:endParaRPr/>
           </a:p>
         </p:txBody>
       </p:sp>
@@ -19860,6 +20191,7 @@
           <a:lstStyle/>
           <a:p>
             <a:pPr algn="ctr"/>
+            <a:endParaRPr/>
           </a:p>
         </p:txBody>
       </p:sp>
@@ -19940,6 +20272,7 @@
           <a:lstStyle/>
           <a:p>
             <a:pPr algn="ctr"/>
+            <a:endParaRPr/>
           </a:p>
         </p:txBody>
       </p:sp>
@@ -20020,6 +20353,7 @@
           <a:lstStyle/>
           <a:p>
             <a:pPr algn="ctr"/>
+            <a:endParaRPr/>
           </a:p>
         </p:txBody>
       </p:sp>
@@ -20100,6 +20434,7 @@
           <a:lstStyle/>
           <a:p>
             <a:pPr algn="ctr"/>
+            <a:endParaRPr/>
           </a:p>
         </p:txBody>
       </p:sp>
@@ -20180,6 +20515,7 @@
           <a:lstStyle/>
           <a:p>
             <a:pPr algn="ctr"/>
+            <a:endParaRPr/>
           </a:p>
         </p:txBody>
       </p:sp>
@@ -20260,6 +20596,7 @@
           <a:lstStyle/>
           <a:p>
             <a:pPr algn="ctr"/>
+            <a:endParaRPr/>
           </a:p>
         </p:txBody>
       </p:sp>
@@ -20340,6 +20677,7 @@
           <a:lstStyle/>
           <a:p>
             <a:pPr algn="ctr"/>
+            <a:endParaRPr/>
           </a:p>
         </p:txBody>
       </p:sp>
@@ -20420,6 +20758,7 @@
           <a:lstStyle/>
           <a:p>
             <a:pPr algn="ctr"/>
+            <a:endParaRPr/>
           </a:p>
         </p:txBody>
       </p:sp>
@@ -20500,6 +20839,7 @@
           <a:lstStyle/>
           <a:p>
             <a:pPr algn="ctr"/>
+            <a:endParaRPr/>
           </a:p>
         </p:txBody>
       </p:sp>
@@ -20580,6 +20920,7 @@
           <a:lstStyle/>
           <a:p>
             <a:pPr algn="ctr"/>
+            <a:endParaRPr/>
           </a:p>
         </p:txBody>
       </p:sp>
@@ -20660,6 +21001,7 @@
           <a:lstStyle/>
           <a:p>
             <a:pPr algn="ctr"/>
+            <a:endParaRPr/>
           </a:p>
         </p:txBody>
       </p:sp>
@@ -20773,6 +21115,7 @@
           <a:lstStyle/>
           <a:p>
             <a:pPr algn="ctr"/>
+            <a:endParaRPr/>
           </a:p>
         </p:txBody>
       </p:sp>
@@ -20851,6 +21194,7 @@
           <a:lstStyle/>
           <a:p>
             <a:pPr algn="ctr"/>
+            <a:endParaRPr/>
           </a:p>
         </p:txBody>
       </p:sp>
@@ -20929,6 +21273,7 @@
           <a:lstStyle/>
           <a:p>
             <a:pPr algn="ctr"/>
+            <a:endParaRPr/>
           </a:p>
         </p:txBody>
       </p:sp>
@@ -21007,6 +21352,7 @@
           <a:lstStyle/>
           <a:p>
             <a:pPr algn="ctr"/>
+            <a:endParaRPr/>
           </a:p>
         </p:txBody>
       </p:sp>
@@ -21085,6 +21431,7 @@
           <a:lstStyle/>
           <a:p>
             <a:pPr algn="ctr"/>
+            <a:endParaRPr/>
           </a:p>
         </p:txBody>
       </p:sp>
@@ -21163,6 +21510,7 @@
           <a:lstStyle/>
           <a:p>
             <a:pPr algn="ctr"/>
+            <a:endParaRPr/>
           </a:p>
         </p:txBody>
       </p:sp>
@@ -21241,6 +21589,7 @@
           <a:lstStyle/>
           <a:p>
             <a:pPr algn="ctr"/>
+            <a:endParaRPr/>
           </a:p>
         </p:txBody>
       </p:sp>
@@ -21319,6 +21668,7 @@
           <a:lstStyle/>
           <a:p>
             <a:pPr algn="ctr"/>
+            <a:endParaRPr/>
           </a:p>
         </p:txBody>
       </p:sp>
@@ -21397,6 +21747,7 @@
           <a:lstStyle/>
           <a:p>
             <a:pPr algn="ctr"/>
+            <a:endParaRPr/>
           </a:p>
         </p:txBody>
       </p:sp>
@@ -21475,6 +21826,7 @@
           <a:lstStyle/>
           <a:p>
             <a:pPr algn="ctr"/>
+            <a:endParaRPr/>
           </a:p>
         </p:txBody>
       </p:sp>
@@ -21518,6 +21870,7 @@
           <a:lstStyle/>
           <a:p>
             <a:pPr algn="ctr"/>
+            <a:endParaRPr/>
           </a:p>
         </p:txBody>
       </p:sp>
@@ -21806,6 +22159,7 @@
           <a:lstStyle/>
           <a:p>
             <a:pPr algn="ctr"/>
+            <a:endParaRPr/>
           </a:p>
         </p:txBody>
       </p:sp>
@@ -21849,6 +22203,7 @@
           <a:lstStyle/>
           <a:p>
             <a:pPr algn="ctr"/>
+            <a:endParaRPr/>
           </a:p>
         </p:txBody>
       </p:sp>
@@ -22137,6 +22492,7 @@
           <a:lstStyle/>
           <a:p>
             <a:pPr algn="ctr"/>
+            <a:endParaRPr/>
           </a:p>
         </p:txBody>
       </p:sp>
@@ -22180,6 +22536,7 @@
           <a:lstStyle/>
           <a:p>
             <a:pPr algn="ctr"/>
+            <a:endParaRPr/>
           </a:p>
         </p:txBody>
       </p:sp>
@@ -22503,6 +22860,7 @@
           <a:lstStyle/>
           <a:p>
             <a:pPr algn="ctr"/>
+            <a:endParaRPr/>
           </a:p>
         </p:txBody>
       </p:sp>
@@ -22686,6 +23044,7 @@
           <a:lstStyle/>
           <a:p>
             <a:pPr algn="ctr"/>
+            <a:endParaRPr/>
           </a:p>
         </p:txBody>
       </p:sp>
@@ -22869,6 +23228,7 @@
           <a:lstStyle/>
           <a:p>
             <a:pPr algn="ctr"/>
+            <a:endParaRPr/>
           </a:p>
         </p:txBody>
       </p:sp>
@@ -23021,7 +23381,7 @@
 </file>
 
 <file path=ppt/slides/slide2.xml><?xml version="1.0" encoding="utf-8"?>
-<p:sld xmlns:a="http://schemas.openxmlformats.org/drawingml/2006/main" xmlns:p="http://schemas.openxmlformats.org/presentationml/2006/main" xmlns:r="http://schemas.openxmlformats.org/officeDocument/2006/relationships">
+<p:sld xmlns:a="http://schemas.openxmlformats.org/drawingml/2006/main" xmlns:r="http://schemas.openxmlformats.org/officeDocument/2006/relationships" xmlns:p="http://schemas.openxmlformats.org/presentationml/2006/main">
   <p:cSld>
     <p:bg>
       <p:bgPr>
@@ -23037,7 +23397,14 @@
         <p:cNvGrpSpPr/>
         <p:nvPr/>
       </p:nvGrpSpPr>
-      <p:grpSpPr/>
+      <p:grpSpPr>
+        <a:xfrm>
+          <a:off x="0" y="0"/>
+          <a:ext cx="0" cy="0"/>
+          <a:chOff x="0" y="0"/>
+          <a:chExt cx="0" cy="0"/>
+        </a:xfrm>
+      </p:grpSpPr>
       <p:sp>
         <p:nvSpPr>
           <p:cNvPr id="2" name="Rectangle 1"/>
@@ -23078,6 +23445,7 @@
           <a:lstStyle/>
           <a:p>
             <a:pPr algn="ctr"/>
+            <a:endParaRPr/>
           </a:p>
         </p:txBody>
       </p:sp>
@@ -23156,6 +23524,7 @@
           <a:lstStyle/>
           <a:p>
             <a:pPr algn="ctr"/>
+            <a:endParaRPr/>
           </a:p>
         </p:txBody>
       </p:sp>
@@ -23199,6 +23568,7 @@
           <a:lstStyle/>
           <a:p>
             <a:pPr algn="ctr"/>
+            <a:endParaRPr/>
           </a:p>
         </p:txBody>
       </p:sp>
@@ -23272,15 +23642,12 @@
           </a:p>
           <a:p>
             <a:pPr algn="l"/>
-            <a:r>
-              <a:rPr sz="1350" b="0">
-                <a:solidFill>
-                  <a:srgbClr val="F2F2F0"/>
-                </a:solidFill>
-                <a:latin typeface="Inter"/>
-              </a:rPr>
-              <a:t/>
-            </a:r>
+            <a:endParaRPr sz="1350" b="0">
+              <a:solidFill>
+                <a:srgbClr val="F2F2F0"/>
+              </a:solidFill>
+              <a:latin typeface="Inter"/>
+            </a:endParaRPr>
           </a:p>
           <a:p>
             <a:pPr algn="l"/>
@@ -23336,6 +23703,7 @@
           <a:lstStyle/>
           <a:p>
             <a:pPr algn="ctr"/>
+            <a:endParaRPr/>
           </a:p>
         </p:txBody>
       </p:sp>
@@ -23379,6 +23747,7 @@
           <a:lstStyle/>
           <a:p>
             <a:pPr algn="ctr"/>
+            <a:endParaRPr/>
           </a:p>
         </p:txBody>
       </p:sp>
@@ -23452,6 +23821,15 @@
           </a:p>
           <a:p>
             <a:pPr algn="l"/>
+            <a:endParaRPr sz="1350" b="0">
+              <a:solidFill>
+                <a:srgbClr val="F2F2F0"/>
+              </a:solidFill>
+              <a:latin typeface="Inter"/>
+            </a:endParaRPr>
+          </a:p>
+          <a:p>
+            <a:pPr algn="l"/>
             <a:r>
               <a:rPr sz="1350" b="0">
                 <a:solidFill>
@@ -23459,32 +23837,17 @@
                 </a:solidFill>
                 <a:latin typeface="Inter"/>
               </a:rPr>
-              <a:t/>
-            </a:r>
-          </a:p>
-          <a:p>
-            <a:pPr algn="l"/>
-            <a:r>
-              <a:rPr sz="1350" b="0">
-                <a:solidFill>
-                  <a:srgbClr val="F2F2F0"/>
-                </a:solidFill>
-                <a:latin typeface="Inter"/>
-              </a:rPr>
               <a:t>Players will learn to love the game and will compete at their appropriate level, while experiencing life-lessons beyond the game.</a:t>
             </a:r>
           </a:p>
           <a:p>
             <a:pPr algn="l"/>
-            <a:r>
-              <a:rPr sz="1350" b="0">
-                <a:solidFill>
-                  <a:srgbClr val="F2F2F0"/>
-                </a:solidFill>
-                <a:latin typeface="Inter"/>
-              </a:rPr>
-              <a:t/>
-            </a:r>
+            <a:endParaRPr sz="1350" b="0">
+              <a:solidFill>
+                <a:srgbClr val="F2F2F0"/>
+              </a:solidFill>
+              <a:latin typeface="Inter"/>
+            </a:endParaRPr>
           </a:p>
           <a:p>
             <a:pPr algn="l"/>
@@ -23509,7 +23872,7 @@
 </file>
 
 <file path=ppt/slides/slide20.xml><?xml version="1.0" encoding="utf-8"?>
-<p:sld xmlns:a="http://schemas.openxmlformats.org/drawingml/2006/main" xmlns:p="http://schemas.openxmlformats.org/presentationml/2006/main" xmlns:r="http://schemas.openxmlformats.org/officeDocument/2006/relationships">
+<p:sld xmlns:a="http://schemas.openxmlformats.org/drawingml/2006/main" xmlns:r="http://schemas.openxmlformats.org/officeDocument/2006/relationships" xmlns:p="http://schemas.openxmlformats.org/presentationml/2006/main">
   <p:cSld>
     <p:bg>
       <p:bgPr>
@@ -23525,7 +23888,14 @@
         <p:cNvGrpSpPr/>
         <p:nvPr/>
       </p:nvGrpSpPr>
-      <p:grpSpPr/>
+      <p:grpSpPr>
+        <a:xfrm>
+          <a:off x="0" y="0"/>
+          <a:ext cx="0" cy="0"/>
+          <a:chOff x="0" y="0"/>
+          <a:chExt cx="0" cy="0"/>
+        </a:xfrm>
+      </p:grpSpPr>
       <p:sp>
         <p:nvSpPr>
           <p:cNvPr id="2" name="Rectangle 1"/>
@@ -23566,6 +23936,7 @@
           <a:lstStyle/>
           <a:p>
             <a:pPr algn="ctr"/>
+            <a:endParaRPr/>
           </a:p>
         </p:txBody>
       </p:sp>
@@ -23609,6 +23980,7 @@
           <a:lstStyle/>
           <a:p>
             <a:pPr algn="ctr"/>
+            <a:endParaRPr/>
           </a:p>
         </p:txBody>
       </p:sp>
@@ -23722,6 +24094,7 @@
           <a:lstStyle/>
           <a:p>
             <a:pPr algn="ctr"/>
+            <a:endParaRPr/>
           </a:p>
         </p:txBody>
       </p:sp>
@@ -23767,6 +24140,7 @@
           <a:lstStyle/>
           <a:p>
             <a:pPr algn="ctr"/>
+            <a:endParaRPr/>
           </a:p>
         </p:txBody>
       </p:sp>
@@ -23810,6 +24184,7 @@
           <a:lstStyle/>
           <a:p>
             <a:pPr algn="ctr"/>
+            <a:endParaRPr/>
           </a:p>
         </p:txBody>
       </p:sp>
@@ -23855,6 +24230,7 @@
           <a:lstStyle/>
           <a:p>
             <a:pPr algn="ctr"/>
+            <a:endParaRPr/>
           </a:p>
         </p:txBody>
       </p:sp>
@@ -23898,6 +24274,7 @@
           <a:lstStyle/>
           <a:p>
             <a:pPr algn="ctr"/>
+            <a:endParaRPr/>
           </a:p>
         </p:txBody>
       </p:sp>
@@ -23943,6 +24320,7 @@
           <a:lstStyle/>
           <a:p>
             <a:pPr algn="ctr"/>
+            <a:endParaRPr/>
           </a:p>
         </p:txBody>
       </p:sp>
@@ -23988,6 +24366,7 @@
           <a:lstStyle/>
           <a:p>
             <a:pPr algn="ctr"/>
+            <a:endParaRPr/>
           </a:p>
         </p:txBody>
       </p:sp>
@@ -24033,6 +24412,7 @@
           <a:lstStyle/>
           <a:p>
             <a:pPr algn="ctr"/>
+            <a:endParaRPr/>
           </a:p>
         </p:txBody>
       </p:sp>
@@ -24078,6 +24458,7 @@
           <a:lstStyle/>
           <a:p>
             <a:pPr algn="ctr"/>
+            <a:endParaRPr/>
           </a:p>
         </p:txBody>
       </p:sp>
@@ -24123,6 +24504,7 @@
           <a:lstStyle/>
           <a:p>
             <a:pPr algn="ctr"/>
+            <a:endParaRPr/>
           </a:p>
         </p:txBody>
       </p:sp>
@@ -24203,6 +24585,7 @@
           <a:lstStyle/>
           <a:p>
             <a:pPr algn="ctr"/>
+            <a:endParaRPr/>
           </a:p>
         </p:txBody>
       </p:sp>
@@ -24283,6 +24666,7 @@
           <a:lstStyle/>
           <a:p>
             <a:pPr algn="ctr"/>
+            <a:endParaRPr/>
           </a:p>
         </p:txBody>
       </p:sp>
@@ -24363,6 +24747,7 @@
           <a:lstStyle/>
           <a:p>
             <a:pPr algn="ctr"/>
+            <a:endParaRPr/>
           </a:p>
         </p:txBody>
       </p:sp>
@@ -24443,6 +24828,7 @@
           <a:lstStyle/>
           <a:p>
             <a:pPr algn="ctr"/>
+            <a:endParaRPr/>
           </a:p>
         </p:txBody>
       </p:sp>
@@ -24523,6 +24909,7 @@
           <a:lstStyle/>
           <a:p>
             <a:pPr algn="ctr"/>
+            <a:endParaRPr/>
           </a:p>
         </p:txBody>
       </p:sp>
@@ -24603,6 +24990,7 @@
           <a:lstStyle/>
           <a:p>
             <a:pPr algn="ctr"/>
+            <a:endParaRPr/>
           </a:p>
         </p:txBody>
       </p:sp>
@@ -24683,6 +25071,7 @@
           <a:lstStyle/>
           <a:p>
             <a:pPr algn="ctr"/>
+            <a:endParaRPr/>
           </a:p>
         </p:txBody>
       </p:sp>
@@ -24763,6 +25152,7 @@
           <a:lstStyle/>
           <a:p>
             <a:pPr algn="ctr"/>
+            <a:endParaRPr/>
           </a:p>
         </p:txBody>
       </p:sp>
@@ -24843,6 +25233,7 @@
           <a:lstStyle/>
           <a:p>
             <a:pPr algn="ctr"/>
+            <a:endParaRPr/>
           </a:p>
         </p:txBody>
       </p:sp>
@@ -24923,6 +25314,7 @@
           <a:lstStyle/>
           <a:p>
             <a:pPr algn="ctr"/>
+            <a:endParaRPr/>
           </a:p>
         </p:txBody>
       </p:sp>
@@ -25036,6 +25428,7 @@
           <a:lstStyle/>
           <a:p>
             <a:pPr algn="ctr"/>
+            <a:endParaRPr/>
           </a:p>
         </p:txBody>
       </p:sp>
@@ -25114,6 +25507,7 @@
           <a:lstStyle/>
           <a:p>
             <a:pPr algn="ctr"/>
+            <a:endParaRPr/>
           </a:p>
         </p:txBody>
       </p:sp>
@@ -25192,6 +25586,7 @@
           <a:lstStyle/>
           <a:p>
             <a:pPr algn="ctr"/>
+            <a:endParaRPr/>
           </a:p>
         </p:txBody>
       </p:sp>
@@ -25270,6 +25665,7 @@
           <a:lstStyle/>
           <a:p>
             <a:pPr algn="ctr"/>
+            <a:endParaRPr/>
           </a:p>
         </p:txBody>
       </p:sp>
@@ -25348,6 +25744,7 @@
           <a:lstStyle/>
           <a:p>
             <a:pPr algn="ctr"/>
+            <a:endParaRPr/>
           </a:p>
         </p:txBody>
       </p:sp>
@@ -25426,6 +25823,7 @@
           <a:lstStyle/>
           <a:p>
             <a:pPr algn="ctr"/>
+            <a:endParaRPr/>
           </a:p>
         </p:txBody>
       </p:sp>
@@ -25504,6 +25902,7 @@
           <a:lstStyle/>
           <a:p>
             <a:pPr algn="ctr"/>
+            <a:endParaRPr/>
           </a:p>
         </p:txBody>
       </p:sp>
@@ -25547,6 +25946,7 @@
           <a:lstStyle/>
           <a:p>
             <a:pPr algn="ctr"/>
+            <a:endParaRPr/>
           </a:p>
         </p:txBody>
       </p:sp>
@@ -25835,6 +26235,7 @@
           <a:lstStyle/>
           <a:p>
             <a:pPr algn="ctr"/>
+            <a:endParaRPr/>
           </a:p>
         </p:txBody>
       </p:sp>
@@ -25878,6 +26279,7 @@
           <a:lstStyle/>
           <a:p>
             <a:pPr algn="ctr"/>
+            <a:endParaRPr/>
           </a:p>
         </p:txBody>
       </p:sp>
@@ -26166,6 +26568,7 @@
           <a:lstStyle/>
           <a:p>
             <a:pPr algn="ctr"/>
+            <a:endParaRPr/>
           </a:p>
         </p:txBody>
       </p:sp>
@@ -26209,6 +26612,7 @@
           <a:lstStyle/>
           <a:p>
             <a:pPr algn="ctr"/>
+            <a:endParaRPr/>
           </a:p>
         </p:txBody>
       </p:sp>
@@ -26532,6 +26936,7 @@
           <a:lstStyle/>
           <a:p>
             <a:pPr algn="ctr"/>
+            <a:endParaRPr/>
           </a:p>
         </p:txBody>
       </p:sp>
@@ -26715,6 +27120,7 @@
           <a:lstStyle/>
           <a:p>
             <a:pPr algn="ctr"/>
+            <a:endParaRPr/>
           </a:p>
         </p:txBody>
       </p:sp>
@@ -26898,6 +27304,7 @@
           <a:lstStyle/>
           <a:p>
             <a:pPr algn="ctr"/>
+            <a:endParaRPr/>
           </a:p>
         </p:txBody>
       </p:sp>
@@ -27050,7 +27457,7 @@
 </file>
 
 <file path=ppt/slides/slide21.xml><?xml version="1.0" encoding="utf-8"?>
-<p:sld xmlns:a="http://schemas.openxmlformats.org/drawingml/2006/main" xmlns:p="http://schemas.openxmlformats.org/presentationml/2006/main" xmlns:r="http://schemas.openxmlformats.org/officeDocument/2006/relationships">
+<p:sld xmlns:a="http://schemas.openxmlformats.org/drawingml/2006/main" xmlns:r="http://schemas.openxmlformats.org/officeDocument/2006/relationships" xmlns:p="http://schemas.openxmlformats.org/presentationml/2006/main">
   <p:cSld>
     <p:bg>
       <p:bgPr>
@@ -27066,7 +27473,14 @@
         <p:cNvGrpSpPr/>
         <p:nvPr/>
       </p:nvGrpSpPr>
-      <p:grpSpPr/>
+      <p:grpSpPr>
+        <a:xfrm>
+          <a:off x="0" y="0"/>
+          <a:ext cx="0" cy="0"/>
+          <a:chOff x="0" y="0"/>
+          <a:chExt cx="0" cy="0"/>
+        </a:xfrm>
+      </p:grpSpPr>
       <p:sp>
         <p:nvSpPr>
           <p:cNvPr id="2" name="Rectangle 1"/>
@@ -27107,6 +27521,7 @@
           <a:lstStyle/>
           <a:p>
             <a:pPr algn="ctr"/>
+            <a:endParaRPr/>
           </a:p>
         </p:txBody>
       </p:sp>
@@ -27150,6 +27565,7 @@
           <a:lstStyle/>
           <a:p>
             <a:pPr algn="ctr"/>
+            <a:endParaRPr/>
           </a:p>
         </p:txBody>
       </p:sp>
@@ -27263,6 +27679,7 @@
           <a:lstStyle/>
           <a:p>
             <a:pPr algn="ctr"/>
+            <a:endParaRPr/>
           </a:p>
         </p:txBody>
       </p:sp>
@@ -27308,6 +27725,7 @@
           <a:lstStyle/>
           <a:p>
             <a:pPr algn="ctr"/>
+            <a:endParaRPr/>
           </a:p>
         </p:txBody>
       </p:sp>
@@ -27351,6 +27769,7 @@
           <a:lstStyle/>
           <a:p>
             <a:pPr algn="ctr"/>
+            <a:endParaRPr/>
           </a:p>
         </p:txBody>
       </p:sp>
@@ -27396,6 +27815,7 @@
           <a:lstStyle/>
           <a:p>
             <a:pPr algn="ctr"/>
+            <a:endParaRPr/>
           </a:p>
         </p:txBody>
       </p:sp>
@@ -27439,6 +27859,7 @@
           <a:lstStyle/>
           <a:p>
             <a:pPr algn="ctr"/>
+            <a:endParaRPr/>
           </a:p>
         </p:txBody>
       </p:sp>
@@ -27484,6 +27905,7 @@
           <a:lstStyle/>
           <a:p>
             <a:pPr algn="ctr"/>
+            <a:endParaRPr/>
           </a:p>
         </p:txBody>
       </p:sp>
@@ -27529,6 +27951,7 @@
           <a:lstStyle/>
           <a:p>
             <a:pPr algn="ctr"/>
+            <a:endParaRPr/>
           </a:p>
         </p:txBody>
       </p:sp>
@@ -27574,6 +27997,7 @@
           <a:lstStyle/>
           <a:p>
             <a:pPr algn="ctr"/>
+            <a:endParaRPr/>
           </a:p>
         </p:txBody>
       </p:sp>
@@ -27619,6 +28043,7 @@
           <a:lstStyle/>
           <a:p>
             <a:pPr algn="ctr"/>
+            <a:endParaRPr/>
           </a:p>
         </p:txBody>
       </p:sp>
@@ -27664,6 +28089,7 @@
           <a:lstStyle/>
           <a:p>
             <a:pPr algn="ctr"/>
+            <a:endParaRPr/>
           </a:p>
         </p:txBody>
       </p:sp>
@@ -27744,6 +28170,7 @@
           <a:lstStyle/>
           <a:p>
             <a:pPr algn="ctr"/>
+            <a:endParaRPr/>
           </a:p>
         </p:txBody>
       </p:sp>
@@ -27824,6 +28251,7 @@
           <a:lstStyle/>
           <a:p>
             <a:pPr algn="ctr"/>
+            <a:endParaRPr/>
           </a:p>
         </p:txBody>
       </p:sp>
@@ -27904,6 +28332,7 @@
           <a:lstStyle/>
           <a:p>
             <a:pPr algn="ctr"/>
+            <a:endParaRPr/>
           </a:p>
         </p:txBody>
       </p:sp>
@@ -27984,6 +28413,7 @@
           <a:lstStyle/>
           <a:p>
             <a:pPr algn="ctr"/>
+            <a:endParaRPr/>
           </a:p>
         </p:txBody>
       </p:sp>
@@ -28064,6 +28494,7 @@
           <a:lstStyle/>
           <a:p>
             <a:pPr algn="ctr"/>
+            <a:endParaRPr/>
           </a:p>
         </p:txBody>
       </p:sp>
@@ -28144,6 +28575,7 @@
           <a:lstStyle/>
           <a:p>
             <a:pPr algn="ctr"/>
+            <a:endParaRPr/>
           </a:p>
         </p:txBody>
       </p:sp>
@@ -28224,6 +28656,7 @@
           <a:lstStyle/>
           <a:p>
             <a:pPr algn="ctr"/>
+            <a:endParaRPr/>
           </a:p>
         </p:txBody>
       </p:sp>
@@ -28304,6 +28737,7 @@
           <a:lstStyle/>
           <a:p>
             <a:pPr algn="ctr"/>
+            <a:endParaRPr/>
           </a:p>
         </p:txBody>
       </p:sp>
@@ -28384,6 +28818,7 @@
           <a:lstStyle/>
           <a:p>
             <a:pPr algn="ctr"/>
+            <a:endParaRPr/>
           </a:p>
         </p:txBody>
       </p:sp>
@@ -28464,6 +28899,7 @@
           <a:lstStyle/>
           <a:p>
             <a:pPr algn="ctr"/>
+            <a:endParaRPr/>
           </a:p>
         </p:txBody>
       </p:sp>
@@ -28577,6 +29013,7 @@
           <a:lstStyle/>
           <a:p>
             <a:pPr algn="ctr"/>
+            <a:endParaRPr/>
           </a:p>
         </p:txBody>
       </p:sp>
@@ -28655,6 +29092,7 @@
           <a:lstStyle/>
           <a:p>
             <a:pPr algn="ctr"/>
+            <a:endParaRPr/>
           </a:p>
         </p:txBody>
       </p:sp>
@@ -28733,6 +29171,7 @@
           <a:lstStyle/>
           <a:p>
             <a:pPr algn="ctr"/>
+            <a:endParaRPr/>
           </a:p>
         </p:txBody>
       </p:sp>
@@ -28811,6 +29250,7 @@
           <a:lstStyle/>
           <a:p>
             <a:pPr algn="ctr"/>
+            <a:endParaRPr/>
           </a:p>
         </p:txBody>
       </p:sp>
@@ -28889,6 +29329,7 @@
           <a:lstStyle/>
           <a:p>
             <a:pPr algn="ctr"/>
+            <a:endParaRPr/>
           </a:p>
         </p:txBody>
       </p:sp>
@@ -28967,6 +29408,7 @@
           <a:lstStyle/>
           <a:p>
             <a:pPr algn="ctr"/>
+            <a:endParaRPr/>
           </a:p>
         </p:txBody>
       </p:sp>
@@ -29045,6 +29487,7 @@
           <a:lstStyle/>
           <a:p>
             <a:pPr algn="ctr"/>
+            <a:endParaRPr/>
           </a:p>
         </p:txBody>
       </p:sp>
@@ -29123,6 +29566,7 @@
           <a:lstStyle/>
           <a:p>
             <a:pPr algn="ctr"/>
+            <a:endParaRPr/>
           </a:p>
         </p:txBody>
       </p:sp>
@@ -29166,6 +29610,7 @@
           <a:lstStyle/>
           <a:p>
             <a:pPr algn="ctr"/>
+            <a:endParaRPr/>
           </a:p>
         </p:txBody>
       </p:sp>
@@ -29454,6 +29899,7 @@
           <a:lstStyle/>
           <a:p>
             <a:pPr algn="ctr"/>
+            <a:endParaRPr/>
           </a:p>
         </p:txBody>
       </p:sp>
@@ -29497,6 +29943,7 @@
           <a:lstStyle/>
           <a:p>
             <a:pPr algn="ctr"/>
+            <a:endParaRPr/>
           </a:p>
         </p:txBody>
       </p:sp>
@@ -29785,6 +30232,7 @@
           <a:lstStyle/>
           <a:p>
             <a:pPr algn="ctr"/>
+            <a:endParaRPr/>
           </a:p>
         </p:txBody>
       </p:sp>
@@ -29828,6 +30276,7 @@
           <a:lstStyle/>
           <a:p>
             <a:pPr algn="ctr"/>
+            <a:endParaRPr/>
           </a:p>
         </p:txBody>
       </p:sp>
@@ -30151,6 +30600,7 @@
           <a:lstStyle/>
           <a:p>
             <a:pPr algn="ctr"/>
+            <a:endParaRPr/>
           </a:p>
         </p:txBody>
       </p:sp>
@@ -30334,6 +30784,7 @@
           <a:lstStyle/>
           <a:p>
             <a:pPr algn="ctr"/>
+            <a:endParaRPr/>
           </a:p>
         </p:txBody>
       </p:sp>
@@ -30517,6 +30968,7 @@
           <a:lstStyle/>
           <a:p>
             <a:pPr algn="ctr"/>
+            <a:endParaRPr/>
           </a:p>
         </p:txBody>
       </p:sp>
@@ -30669,7 +31121,7 @@
 </file>
 
 <file path=ppt/slides/slide3.xml><?xml version="1.0" encoding="utf-8"?>
-<p:sld xmlns:a="http://schemas.openxmlformats.org/drawingml/2006/main" xmlns:p="http://schemas.openxmlformats.org/presentationml/2006/main" xmlns:r="http://schemas.openxmlformats.org/officeDocument/2006/relationships">
+<p:sld xmlns:a="http://schemas.openxmlformats.org/drawingml/2006/main" xmlns:r="http://schemas.openxmlformats.org/officeDocument/2006/relationships" xmlns:p="http://schemas.openxmlformats.org/presentationml/2006/main">
   <p:cSld>
     <p:bg>
       <p:bgPr>
@@ -30685,7 +31137,14 @@
         <p:cNvGrpSpPr/>
         <p:nvPr/>
       </p:nvGrpSpPr>
-      <p:grpSpPr/>
+      <p:grpSpPr>
+        <a:xfrm>
+          <a:off x="0" y="0"/>
+          <a:ext cx="0" cy="0"/>
+          <a:chOff x="0" y="0"/>
+          <a:chExt cx="0" cy="0"/>
+        </a:xfrm>
+      </p:grpSpPr>
       <p:sp>
         <p:nvSpPr>
           <p:cNvPr id="2" name="Rectangle 1"/>
@@ -30726,6 +31185,7 @@
           <a:lstStyle/>
           <a:p>
             <a:pPr algn="ctr"/>
+            <a:endParaRPr/>
           </a:p>
         </p:txBody>
       </p:sp>
@@ -30804,6 +31264,7 @@
           <a:lstStyle/>
           <a:p>
             <a:pPr algn="ctr"/>
+            <a:endParaRPr/>
           </a:p>
         </p:txBody>
       </p:sp>
@@ -30847,6 +31308,7 @@
           <a:lstStyle/>
           <a:p>
             <a:pPr algn="ctr"/>
+            <a:endParaRPr/>
           </a:p>
         </p:txBody>
       </p:sp>
@@ -30960,6 +31422,7 @@
           <a:lstStyle/>
           <a:p>
             <a:pPr algn="ctr"/>
+            <a:endParaRPr/>
           </a:p>
         </p:txBody>
       </p:sp>
@@ -31003,6 +31466,7 @@
           <a:lstStyle/>
           <a:p>
             <a:pPr algn="ctr"/>
+            <a:endParaRPr/>
           </a:p>
         </p:txBody>
       </p:sp>
@@ -31116,6 +31580,7 @@
           <a:lstStyle/>
           <a:p>
             <a:pPr algn="ctr"/>
+            <a:endParaRPr/>
           </a:p>
         </p:txBody>
       </p:sp>
@@ -31159,6 +31624,7 @@
           <a:lstStyle/>
           <a:p>
             <a:pPr algn="ctr"/>
+            <a:endParaRPr/>
           </a:p>
         </p:txBody>
       </p:sp>
@@ -31272,6 +31738,7 @@
           <a:lstStyle/>
           <a:p>
             <a:pPr algn="ctr"/>
+            <a:endParaRPr/>
           </a:p>
         </p:txBody>
       </p:sp>
@@ -31315,6 +31782,7 @@
           <a:lstStyle/>
           <a:p>
             <a:pPr algn="ctr"/>
+            <a:endParaRPr/>
           </a:p>
         </p:txBody>
       </p:sp>
@@ -31428,6 +31896,7 @@
           <a:lstStyle/>
           <a:p>
             <a:pPr algn="ctr"/>
+            <a:endParaRPr/>
           </a:p>
         </p:txBody>
       </p:sp>
@@ -31471,6 +31940,7 @@
           <a:lstStyle/>
           <a:p>
             <a:pPr algn="ctr"/>
+            <a:endParaRPr/>
           </a:p>
         </p:txBody>
       </p:sp>
@@ -31553,7 +32023,7 @@
 </file>
 
 <file path=ppt/slides/slide4.xml><?xml version="1.0" encoding="utf-8"?>
-<p:sld xmlns:a="http://schemas.openxmlformats.org/drawingml/2006/main" xmlns:p="http://schemas.openxmlformats.org/presentationml/2006/main" xmlns:r="http://schemas.openxmlformats.org/officeDocument/2006/relationships">
+<p:sld xmlns:a="http://schemas.openxmlformats.org/drawingml/2006/main" xmlns:r="http://schemas.openxmlformats.org/officeDocument/2006/relationships" xmlns:p="http://schemas.openxmlformats.org/presentationml/2006/main">
   <p:cSld>
     <p:bg>
       <p:bgPr>
@@ -31569,7 +32039,14 @@
         <p:cNvGrpSpPr/>
         <p:nvPr/>
       </p:nvGrpSpPr>
-      <p:grpSpPr/>
+      <p:grpSpPr>
+        <a:xfrm>
+          <a:off x="0" y="0"/>
+          <a:ext cx="0" cy="0"/>
+          <a:chOff x="0" y="0"/>
+          <a:chExt cx="0" cy="0"/>
+        </a:xfrm>
+      </p:grpSpPr>
       <p:sp>
         <p:nvSpPr>
           <p:cNvPr id="2" name="Rectangle 1"/>
@@ -31610,6 +32087,7 @@
           <a:lstStyle/>
           <a:p>
             <a:pPr algn="ctr"/>
+            <a:endParaRPr/>
           </a:p>
         </p:txBody>
       </p:sp>
@@ -31690,6 +32168,7 @@
           <a:lstStyle/>
           <a:p>
             <a:pPr algn="ctr"/>
+            <a:endParaRPr/>
           </a:p>
         </p:txBody>
       </p:sp>
@@ -31717,7 +32196,7 @@
           <a:p>
             <a:pPr algn="ctr"/>
             <a:r>
-              <a:rPr sz="2100" b="1">
+              <a:rPr sz="2100" b="1" dirty="0">
                 <a:solidFill>
                   <a:srgbClr val="0D0D0D"/>
                 </a:solidFill>
@@ -31768,6 +32247,7 @@
           <a:lstStyle/>
           <a:p>
             <a:pPr algn="ctr"/>
+            <a:endParaRPr/>
           </a:p>
         </p:txBody>
       </p:sp>
@@ -31813,6 +32293,7 @@
           <a:lstStyle/>
           <a:p>
             <a:pPr algn="ctr"/>
+            <a:endParaRPr/>
           </a:p>
         </p:txBody>
       </p:sp>
@@ -31891,6 +32372,7 @@
           <a:lstStyle/>
           <a:p>
             <a:pPr algn="ctr"/>
+            <a:endParaRPr/>
           </a:p>
         </p:txBody>
       </p:sp>
@@ -31936,6 +32418,7 @@
           <a:lstStyle/>
           <a:p>
             <a:pPr algn="ctr"/>
+            <a:endParaRPr/>
           </a:p>
         </p:txBody>
       </p:sp>
@@ -32014,6 +32497,7 @@
           <a:lstStyle/>
           <a:p>
             <a:pPr algn="ctr"/>
+            <a:endParaRPr/>
           </a:p>
         </p:txBody>
       </p:sp>
@@ -32059,6 +32543,7 @@
           <a:lstStyle/>
           <a:p>
             <a:pPr algn="ctr"/>
+            <a:endParaRPr/>
           </a:p>
         </p:txBody>
       </p:sp>
@@ -32086,7 +32571,7 @@
           <a:p>
             <a:pPr algn="ctr"/>
             <a:r>
-              <a:rPr sz="2100" b="1">
+              <a:rPr sz="2100" b="1" dirty="0">
                 <a:solidFill>
                   <a:srgbClr val="0D0D0D"/>
                 </a:solidFill>
@@ -32137,6 +32622,7 @@
           <a:lstStyle/>
           <a:p>
             <a:pPr algn="ctr"/>
+            <a:endParaRPr/>
           </a:p>
         </p:txBody>
       </p:sp>
@@ -32182,6 +32668,7 @@
           <a:lstStyle/>
           <a:p>
             <a:pPr algn="ctr"/>
+            <a:endParaRPr/>
           </a:p>
         </p:txBody>
       </p:sp>
@@ -32260,6 +32747,7 @@
           <a:lstStyle/>
           <a:p>
             <a:pPr algn="ctr"/>
+            <a:endParaRPr/>
           </a:p>
         </p:txBody>
       </p:sp>
@@ -32305,6 +32793,7 @@
           <a:lstStyle/>
           <a:p>
             <a:pPr algn="ctr"/>
+            <a:endParaRPr/>
           </a:p>
         </p:txBody>
       </p:sp>
@@ -32383,6 +32872,7 @@
           <a:lstStyle/>
           <a:p>
             <a:pPr algn="ctr"/>
+            <a:endParaRPr/>
           </a:p>
         </p:txBody>
       </p:sp>
@@ -32428,6 +32918,7 @@
           <a:lstStyle/>
           <a:p>
             <a:pPr algn="ctr"/>
+            <a:endParaRPr/>
           </a:p>
         </p:txBody>
       </p:sp>
@@ -32482,8 +32973,8 @@
         </p:blipFill>
         <p:spPr>
           <a:xfrm>
-            <a:off x="8229600" y="987552"/>
-            <a:ext cx="2011680" cy="5394960"/>
+            <a:off x="314511" y="1200193"/>
+            <a:ext cx="2645760" cy="3499823"/>
           </a:xfrm>
           <a:prstGeom prst="rect">
             <a:avLst/>
@@ -32500,14 +32991,15 @@
         </p:nvPicPr>
         <p:blipFill>
           <a:blip r:embed="rId3"/>
+          <a:srcRect l="10722" t="18785"/>
           <a:stretch>
             <a:fillRect/>
           </a:stretch>
         </p:blipFill>
         <p:spPr>
           <a:xfrm>
-            <a:off x="10332720" y="987552"/>
-            <a:ext cx="1463040" cy="5394960"/>
+            <a:off x="7921089" y="1024128"/>
+            <a:ext cx="2760971" cy="4427733"/>
           </a:xfrm>
           <a:prstGeom prst="rect">
             <a:avLst/>
@@ -32558,7 +33050,7 @@
 </file>
 
 <file path=ppt/slides/slide5.xml><?xml version="1.0" encoding="utf-8"?>
-<p:sld xmlns:a="http://schemas.openxmlformats.org/drawingml/2006/main" xmlns:p="http://schemas.openxmlformats.org/presentationml/2006/main" xmlns:r="http://schemas.openxmlformats.org/officeDocument/2006/relationships">
+<p:sld xmlns:a="http://schemas.openxmlformats.org/drawingml/2006/main" xmlns:r="http://schemas.openxmlformats.org/officeDocument/2006/relationships" xmlns:p="http://schemas.openxmlformats.org/presentationml/2006/main">
   <p:cSld>
     <p:bg>
       <p:bgPr>
@@ -32574,7 +33066,14 @@
         <p:cNvGrpSpPr/>
         <p:nvPr/>
       </p:nvGrpSpPr>
-      <p:grpSpPr/>
+      <p:grpSpPr>
+        <a:xfrm>
+          <a:off x="0" y="0"/>
+          <a:ext cx="0" cy="0"/>
+          <a:chOff x="0" y="0"/>
+          <a:chExt cx="0" cy="0"/>
+        </a:xfrm>
+      </p:grpSpPr>
       <p:sp>
         <p:nvSpPr>
           <p:cNvPr id="2" name="Rectangle 1"/>
@@ -32615,6 +33114,7 @@
           <a:lstStyle/>
           <a:p>
             <a:pPr algn="ctr"/>
+            <a:endParaRPr/>
           </a:p>
         </p:txBody>
       </p:sp>
@@ -32693,6 +33193,7 @@
           <a:lstStyle/>
           <a:p>
             <a:pPr algn="ctr"/>
+            <a:endParaRPr/>
           </a:p>
         </p:txBody>
       </p:sp>
@@ -32736,6 +33237,7 @@
           <a:lstStyle/>
           <a:p>
             <a:pPr algn="ctr"/>
+            <a:endParaRPr/>
           </a:p>
         </p:txBody>
       </p:sp>
@@ -32849,6 +33351,7 @@
           <a:lstStyle/>
           <a:p>
             <a:pPr algn="ctr"/>
+            <a:endParaRPr/>
           </a:p>
         </p:txBody>
       </p:sp>
@@ -33207,6 +33710,7 @@
           <a:lstStyle/>
           <a:p>
             <a:pPr algn="ctr"/>
+            <a:endParaRPr/>
           </a:p>
         </p:txBody>
       </p:sp>
@@ -33250,6 +33754,7 @@
           <a:lstStyle/>
           <a:p>
             <a:pPr algn="ctr"/>
+            <a:endParaRPr/>
           </a:p>
         </p:txBody>
       </p:sp>
@@ -33363,6 +33868,7 @@
           <a:lstStyle/>
           <a:p>
             <a:pPr algn="ctr"/>
+            <a:endParaRPr/>
           </a:p>
         </p:txBody>
       </p:sp>
@@ -33651,6 +34157,7 @@
           <a:lstStyle/>
           <a:p>
             <a:pPr algn="ctr"/>
+            <a:endParaRPr/>
           </a:p>
         </p:txBody>
       </p:sp>
@@ -33694,6 +34201,7 @@
           <a:lstStyle/>
           <a:p>
             <a:pPr algn="ctr"/>
+            <a:endParaRPr/>
           </a:p>
         </p:txBody>
       </p:sp>
@@ -33807,6 +34315,7 @@
           <a:lstStyle/>
           <a:p>
             <a:pPr algn="ctr"/>
+            <a:endParaRPr/>
           </a:p>
         </p:txBody>
       </p:sp>
@@ -34134,7 +34643,7 @@
 </file>
 
 <file path=ppt/slides/slide6.xml><?xml version="1.0" encoding="utf-8"?>
-<p:sld xmlns:a="http://schemas.openxmlformats.org/drawingml/2006/main" xmlns:p="http://schemas.openxmlformats.org/presentationml/2006/main" xmlns:r="http://schemas.openxmlformats.org/officeDocument/2006/relationships">
+<p:sld xmlns:a="http://schemas.openxmlformats.org/drawingml/2006/main" xmlns:r="http://schemas.openxmlformats.org/officeDocument/2006/relationships" xmlns:p="http://schemas.openxmlformats.org/presentationml/2006/main">
   <p:cSld>
     <p:bg>
       <p:bgPr>
@@ -34150,7 +34659,14 @@
         <p:cNvGrpSpPr/>
         <p:nvPr/>
       </p:nvGrpSpPr>
-      <p:grpSpPr/>
+      <p:grpSpPr>
+        <a:xfrm>
+          <a:off x="0" y="0"/>
+          <a:ext cx="0" cy="0"/>
+          <a:chOff x="0" y="0"/>
+          <a:chExt cx="0" cy="0"/>
+        </a:xfrm>
+      </p:grpSpPr>
       <p:sp>
         <p:nvSpPr>
           <p:cNvPr id="2" name="Rectangle 1"/>
@@ -34191,6 +34707,7 @@
           <a:lstStyle/>
           <a:p>
             <a:pPr algn="ctr"/>
+            <a:endParaRPr/>
           </a:p>
         </p:txBody>
       </p:sp>
@@ -34269,6 +34786,7 @@
           <a:lstStyle/>
           <a:p>
             <a:pPr algn="ctr"/>
+            <a:endParaRPr/>
           </a:p>
         </p:txBody>
       </p:sp>
@@ -34312,6 +34830,7 @@
           <a:lstStyle/>
           <a:p>
             <a:pPr algn="ctr"/>
+            <a:endParaRPr/>
           </a:p>
         </p:txBody>
       </p:sp>
@@ -34460,6 +34979,7 @@
           <a:lstStyle/>
           <a:p>
             <a:pPr algn="ctr"/>
+            <a:endParaRPr/>
           </a:p>
         </p:txBody>
       </p:sp>
@@ -34503,6 +35023,7 @@
           <a:lstStyle/>
           <a:p>
             <a:pPr algn="ctr"/>
+            <a:endParaRPr/>
           </a:p>
         </p:txBody>
       </p:sp>
@@ -34651,6 +35172,7 @@
           <a:lstStyle/>
           <a:p>
             <a:pPr algn="ctr"/>
+            <a:endParaRPr/>
           </a:p>
         </p:txBody>
       </p:sp>
@@ -34694,6 +35216,7 @@
           <a:lstStyle/>
           <a:p>
             <a:pPr algn="ctr"/>
+            <a:endParaRPr/>
           </a:p>
         </p:txBody>
       </p:sp>
@@ -34842,6 +35365,7 @@
           <a:lstStyle/>
           <a:p>
             <a:pPr algn="ctr"/>
+            <a:endParaRPr/>
           </a:p>
         </p:txBody>
       </p:sp>
@@ -34885,6 +35409,7 @@
           <a:lstStyle/>
           <a:p>
             <a:pPr algn="ctr"/>
+            <a:endParaRPr/>
           </a:p>
         </p:txBody>
       </p:sp>
@@ -35002,7 +35527,7 @@
 </file>
 
 <file path=ppt/slides/slide7.xml><?xml version="1.0" encoding="utf-8"?>
-<p:sld xmlns:a="http://schemas.openxmlformats.org/drawingml/2006/main" xmlns:p="http://schemas.openxmlformats.org/presentationml/2006/main" xmlns:r="http://schemas.openxmlformats.org/officeDocument/2006/relationships">
+<p:sld xmlns:a="http://schemas.openxmlformats.org/drawingml/2006/main" xmlns:r="http://schemas.openxmlformats.org/officeDocument/2006/relationships" xmlns:p="http://schemas.openxmlformats.org/presentationml/2006/main">
   <p:cSld>
     <p:bg>
       <p:bgPr>
@@ -35018,7 +35543,14 @@
         <p:cNvGrpSpPr/>
         <p:nvPr/>
       </p:nvGrpSpPr>
-      <p:grpSpPr/>
+      <p:grpSpPr>
+        <a:xfrm>
+          <a:off x="0" y="0"/>
+          <a:ext cx="0" cy="0"/>
+          <a:chOff x="0" y="0"/>
+          <a:chExt cx="0" cy="0"/>
+        </a:xfrm>
+      </p:grpSpPr>
       <p:sp>
         <p:nvSpPr>
           <p:cNvPr id="2" name="Rectangle 1"/>
@@ -35059,6 +35591,7 @@
           <a:lstStyle/>
           <a:p>
             <a:pPr algn="ctr"/>
+            <a:endParaRPr/>
           </a:p>
         </p:txBody>
       </p:sp>
@@ -35172,6 +35705,7 @@
           <a:lstStyle/>
           <a:p>
             <a:pPr algn="ctr"/>
+            <a:endParaRPr/>
           </a:p>
         </p:txBody>
       </p:sp>
@@ -35215,6 +35749,7 @@
           <a:lstStyle/>
           <a:p>
             <a:pPr algn="ctr"/>
+            <a:endParaRPr/>
           </a:p>
         </p:txBody>
       </p:sp>
@@ -35363,6 +35898,7 @@
           <a:lstStyle/>
           <a:p>
             <a:pPr algn="ctr"/>
+            <a:endParaRPr/>
           </a:p>
         </p:txBody>
       </p:sp>
@@ -35546,6 +36082,7 @@
           <a:lstStyle/>
           <a:p>
             <a:pPr algn="ctr"/>
+            <a:endParaRPr/>
           </a:p>
         </p:txBody>
       </p:sp>
@@ -35729,6 +36266,7 @@
           <a:lstStyle/>
           <a:p>
             <a:pPr algn="ctr"/>
+            <a:endParaRPr/>
           </a:p>
         </p:txBody>
       </p:sp>
@@ -35912,6 +36450,7 @@
           <a:lstStyle/>
           <a:p>
             <a:pPr algn="ctr"/>
+            <a:endParaRPr/>
           </a:p>
         </p:txBody>
       </p:sp>
@@ -36064,7 +36603,7 @@
 </file>
 
 <file path=ppt/slides/slide8.xml><?xml version="1.0" encoding="utf-8"?>
-<p:sld xmlns:a="http://schemas.openxmlformats.org/drawingml/2006/main" xmlns:p="http://schemas.openxmlformats.org/presentationml/2006/main" xmlns:r="http://schemas.openxmlformats.org/officeDocument/2006/relationships">
+<p:sld xmlns:a="http://schemas.openxmlformats.org/drawingml/2006/main" xmlns:r="http://schemas.openxmlformats.org/officeDocument/2006/relationships" xmlns:p="http://schemas.openxmlformats.org/presentationml/2006/main">
   <p:cSld>
     <p:bg>
       <p:bgPr>
@@ -36080,7 +36619,14 @@
         <p:cNvGrpSpPr/>
         <p:nvPr/>
       </p:nvGrpSpPr>
-      <p:grpSpPr/>
+      <p:grpSpPr>
+        <a:xfrm>
+          <a:off x="0" y="0"/>
+          <a:ext cx="0" cy="0"/>
+          <a:chOff x="0" y="0"/>
+          <a:chExt cx="0" cy="0"/>
+        </a:xfrm>
+      </p:grpSpPr>
       <p:sp>
         <p:nvSpPr>
           <p:cNvPr id="2" name="Rectangle 1"/>
@@ -36121,6 +36667,7 @@
           <a:lstStyle/>
           <a:p>
             <a:pPr algn="ctr"/>
+            <a:endParaRPr/>
           </a:p>
         </p:txBody>
       </p:sp>
@@ -36178,9 +36725,27 @@
                 <a:tableStyleId>{5C22544A-7EE6-4342-B048-85BDC9FD1C3A}</a:tableStyleId>
               </a:tblPr>
               <a:tblGrid>
-                <a:gridCol w="1325880"/>
-                <a:gridCol w="4974336"/>
-                <a:gridCol w="4974336"/>
+                <a:gridCol w="1325880">
+                  <a:extLst>
+                    <a:ext uri="{9D8B030D-6E8A-4147-A177-3AD203B41FA5}">
+                      <a16:colId xmlns:a16="http://schemas.microsoft.com/office/drawing/2014/main" val="20000"/>
+                    </a:ext>
+                  </a:extLst>
+                </a:gridCol>
+                <a:gridCol w="4974336">
+                  <a:extLst>
+                    <a:ext uri="{9D8B030D-6E8A-4147-A177-3AD203B41FA5}">
+                      <a16:colId xmlns:a16="http://schemas.microsoft.com/office/drawing/2014/main" val="20001"/>
+                    </a:ext>
+                  </a:extLst>
+                </a:gridCol>
+                <a:gridCol w="4974336">
+                  <a:extLst>
+                    <a:ext uri="{9D8B030D-6E8A-4147-A177-3AD203B41FA5}">
+                      <a16:colId xmlns:a16="http://schemas.microsoft.com/office/drawing/2014/main" val="20002"/>
+                    </a:ext>
+                  </a:extLst>
+                </a:gridCol>
               </a:tblGrid>
               <a:tr h="1405890">
                 <a:tc>
@@ -36252,11 +36817,16 @@
                     </a:solidFill>
                   </a:tcPr>
                 </a:tc>
+                <a:extLst>
+                  <a:ext uri="{0D108BD9-81ED-4DB2-BD59-A6C34878D82A}">
+                    <a16:rowId xmlns:a16="http://schemas.microsoft.com/office/drawing/2014/main" val="10000"/>
+                  </a:ext>
+                </a:extLst>
               </a:tr>
               <a:tr h="1405890">
                 <a:tc>
                   <a:txBody>
-                    <a:bodyPr wrap="square"/>
+                    <a:bodyPr/>
                     <a:lstStyle/>
                     <a:p>
                       <a:pPr algn="ctr"/>
@@ -36279,7 +36849,7 @@
                 </a:tc>
                 <a:tc>
                   <a:txBody>
-                    <a:bodyPr wrap="square"/>
+                    <a:bodyPr/>
                     <a:lstStyle/>
                     <a:p>
                       <a:pPr algn="l"/>
@@ -36302,7 +36872,7 @@
                 </a:tc>
                 <a:tc>
                   <a:txBody>
-                    <a:bodyPr wrap="square"/>
+                    <a:bodyPr/>
                     <a:lstStyle/>
                     <a:p>
                       <a:pPr algn="l"/>
@@ -36323,11 +36893,16 @@
                     </a:solidFill>
                   </a:tcPr>
                 </a:tc>
+                <a:extLst>
+                  <a:ext uri="{0D108BD9-81ED-4DB2-BD59-A6C34878D82A}">
+                    <a16:rowId xmlns:a16="http://schemas.microsoft.com/office/drawing/2014/main" val="10001"/>
+                  </a:ext>
+                </a:extLst>
               </a:tr>
               <a:tr h="1405890">
                 <a:tc>
                   <a:txBody>
-                    <a:bodyPr wrap="square"/>
+                    <a:bodyPr/>
                     <a:lstStyle/>
                     <a:p>
                       <a:pPr algn="ctr"/>
@@ -36350,7 +36925,7 @@
                 </a:tc>
                 <a:tc>
                   <a:txBody>
-                    <a:bodyPr wrap="square"/>
+                    <a:bodyPr/>
                     <a:lstStyle/>
                     <a:p>
                       <a:pPr algn="l"/>
@@ -36373,7 +36948,7 @@
                 </a:tc>
                 <a:tc>
                   <a:txBody>
-                    <a:bodyPr wrap="square"/>
+                    <a:bodyPr/>
                     <a:lstStyle/>
                     <a:p>
                       <a:pPr algn="l"/>
@@ -36394,11 +36969,16 @@
                     </a:solidFill>
                   </a:tcPr>
                 </a:tc>
+                <a:extLst>
+                  <a:ext uri="{0D108BD9-81ED-4DB2-BD59-A6C34878D82A}">
+                    <a16:rowId xmlns:a16="http://schemas.microsoft.com/office/drawing/2014/main" val="10002"/>
+                  </a:ext>
+                </a:extLst>
               </a:tr>
               <a:tr h="1405890">
                 <a:tc>
                   <a:txBody>
-                    <a:bodyPr wrap="square"/>
+                    <a:bodyPr/>
                     <a:lstStyle/>
                     <a:p>
                       <a:pPr algn="ctr"/>
@@ -36421,7 +37001,7 @@
                 </a:tc>
                 <a:tc>
                   <a:txBody>
-                    <a:bodyPr wrap="square"/>
+                    <a:bodyPr/>
                     <a:lstStyle/>
                     <a:p>
                       <a:pPr algn="l"/>
@@ -36444,7 +37024,7 @@
                 </a:tc>
                 <a:tc>
                   <a:txBody>
-                    <a:bodyPr wrap="square"/>
+                    <a:bodyPr/>
                     <a:lstStyle/>
                     <a:p>
                       <a:pPr algn="l"/>
@@ -36465,6 +37045,11 @@
                     </a:solidFill>
                   </a:tcPr>
                 </a:tc>
+                <a:extLst>
+                  <a:ext uri="{0D108BD9-81ED-4DB2-BD59-A6C34878D82A}">
+                    <a16:rowId xmlns:a16="http://schemas.microsoft.com/office/drawing/2014/main" val="10003"/>
+                  </a:ext>
+                </a:extLst>
               </a:tr>
             </a:tbl>
           </a:graphicData>
@@ -36479,7 +37064,7 @@
 </file>
 
 <file path=ppt/slides/slide9.xml><?xml version="1.0" encoding="utf-8"?>
-<p:sld xmlns:a="http://schemas.openxmlformats.org/drawingml/2006/main" xmlns:p="http://schemas.openxmlformats.org/presentationml/2006/main" xmlns:r="http://schemas.openxmlformats.org/officeDocument/2006/relationships">
+<p:sld xmlns:a="http://schemas.openxmlformats.org/drawingml/2006/main" xmlns:r="http://schemas.openxmlformats.org/officeDocument/2006/relationships" xmlns:p="http://schemas.openxmlformats.org/presentationml/2006/main">
   <p:cSld>
     <p:bg>
       <p:bgPr>
@@ -36495,7 +37080,14 @@
         <p:cNvGrpSpPr/>
         <p:nvPr/>
       </p:nvGrpSpPr>
-      <p:grpSpPr/>
+      <p:grpSpPr>
+        <a:xfrm>
+          <a:off x="0" y="0"/>
+          <a:ext cx="0" cy="0"/>
+          <a:chOff x="0" y="0"/>
+          <a:chExt cx="0" cy="0"/>
+        </a:xfrm>
+      </p:grpSpPr>
       <p:sp>
         <p:nvSpPr>
           <p:cNvPr id="2" name="Rectangle 1"/>
@@ -36536,6 +37128,7 @@
           <a:lstStyle/>
           <a:p>
             <a:pPr algn="ctr"/>
+            <a:endParaRPr/>
           </a:p>
         </p:txBody>
       </p:sp>
@@ -36593,9 +37186,27 @@
                 <a:tableStyleId>{5C22544A-7EE6-4342-B048-85BDC9FD1C3A}</a:tableStyleId>
               </a:tblPr>
               <a:tblGrid>
-                <a:gridCol w="1325880"/>
-                <a:gridCol w="4974336"/>
-                <a:gridCol w="4974336"/>
+                <a:gridCol w="1325880">
+                  <a:extLst>
+                    <a:ext uri="{9D8B030D-6E8A-4147-A177-3AD203B41FA5}">
+                      <a16:colId xmlns:a16="http://schemas.microsoft.com/office/drawing/2014/main" val="20000"/>
+                    </a:ext>
+                  </a:extLst>
+                </a:gridCol>
+                <a:gridCol w="4974336">
+                  <a:extLst>
+                    <a:ext uri="{9D8B030D-6E8A-4147-A177-3AD203B41FA5}">
+                      <a16:colId xmlns:a16="http://schemas.microsoft.com/office/drawing/2014/main" val="20001"/>
+                    </a:ext>
+                  </a:extLst>
+                </a:gridCol>
+                <a:gridCol w="4974336">
+                  <a:extLst>
+                    <a:ext uri="{9D8B030D-6E8A-4147-A177-3AD203B41FA5}">
+                      <a16:colId xmlns:a16="http://schemas.microsoft.com/office/drawing/2014/main" val="20002"/>
+                    </a:ext>
+                  </a:extLst>
+                </a:gridCol>
               </a:tblGrid>
               <a:tr h="1405890">
                 <a:tc>
@@ -36667,11 +37278,16 @@
                     </a:solidFill>
                   </a:tcPr>
                 </a:tc>
+                <a:extLst>
+                  <a:ext uri="{0D108BD9-81ED-4DB2-BD59-A6C34878D82A}">
+                    <a16:rowId xmlns:a16="http://schemas.microsoft.com/office/drawing/2014/main" val="10000"/>
+                  </a:ext>
+                </a:extLst>
               </a:tr>
               <a:tr h="1405890">
                 <a:tc>
                   <a:txBody>
-                    <a:bodyPr wrap="square"/>
+                    <a:bodyPr/>
                     <a:lstStyle/>
                     <a:p>
                       <a:pPr algn="ctr"/>
@@ -36694,7 +37310,7 @@
                 </a:tc>
                 <a:tc>
                   <a:txBody>
-                    <a:bodyPr wrap="square"/>
+                    <a:bodyPr/>
                     <a:lstStyle/>
                     <a:p>
                       <a:pPr algn="l"/>
@@ -36717,7 +37333,7 @@
                 </a:tc>
                 <a:tc>
                   <a:txBody>
-                    <a:bodyPr wrap="square"/>
+                    <a:bodyPr/>
                     <a:lstStyle/>
                     <a:p>
                       <a:pPr algn="l"/>
@@ -36738,11 +37354,16 @@
                     </a:solidFill>
                   </a:tcPr>
                 </a:tc>
+                <a:extLst>
+                  <a:ext uri="{0D108BD9-81ED-4DB2-BD59-A6C34878D82A}">
+                    <a16:rowId xmlns:a16="http://schemas.microsoft.com/office/drawing/2014/main" val="10001"/>
+                  </a:ext>
+                </a:extLst>
               </a:tr>
               <a:tr h="1405890">
                 <a:tc>
                   <a:txBody>
-                    <a:bodyPr wrap="square"/>
+                    <a:bodyPr/>
                     <a:lstStyle/>
                     <a:p>
                       <a:pPr algn="ctr"/>
@@ -36765,7 +37386,7 @@
                 </a:tc>
                 <a:tc>
                   <a:txBody>
-                    <a:bodyPr wrap="square"/>
+                    <a:bodyPr/>
                     <a:lstStyle/>
                     <a:p>
                       <a:pPr algn="l"/>
@@ -36788,7 +37409,7 @@
                 </a:tc>
                 <a:tc>
                   <a:txBody>
-                    <a:bodyPr wrap="square"/>
+                    <a:bodyPr/>
                     <a:lstStyle/>
                     <a:p>
                       <a:pPr algn="l"/>
@@ -36809,11 +37430,16 @@
                     </a:solidFill>
                   </a:tcPr>
                 </a:tc>
+                <a:extLst>
+                  <a:ext uri="{0D108BD9-81ED-4DB2-BD59-A6C34878D82A}">
+                    <a16:rowId xmlns:a16="http://schemas.microsoft.com/office/drawing/2014/main" val="10002"/>
+                  </a:ext>
+                </a:extLst>
               </a:tr>
               <a:tr h="1405890">
                 <a:tc>
                   <a:txBody>
-                    <a:bodyPr wrap="square"/>
+                    <a:bodyPr/>
                     <a:lstStyle/>
                     <a:p>
                       <a:pPr algn="ctr"/>
@@ -36836,7 +37462,7 @@
                 </a:tc>
                 <a:tc>
                   <a:txBody>
-                    <a:bodyPr wrap="square"/>
+                    <a:bodyPr/>
                     <a:lstStyle/>
                     <a:p>
                       <a:pPr algn="l"/>
@@ -36859,7 +37485,7 @@
                 </a:tc>
                 <a:tc>
                   <a:txBody>
-                    <a:bodyPr wrap="square"/>
+                    <a:bodyPr/>
                     <a:lstStyle/>
                     <a:p>
                       <a:pPr algn="l"/>
@@ -36880,6 +37506,11 @@
                     </a:solidFill>
                   </a:tcPr>
                 </a:tc>
+                <a:extLst>
+                  <a:ext uri="{0D108BD9-81ED-4DB2-BD59-A6C34878D82A}">
+                    <a16:rowId xmlns:a16="http://schemas.microsoft.com/office/drawing/2014/main" val="10003"/>
+                  </a:ext>
+                </a:extLst>
               </a:tr>
             </a:tbl>
           </a:graphicData>
